--- a/public/videos/repositories/leaflet-app1/leaflet-app1-tech-preview.pptx
+++ b/public/videos/repositories/leaflet-app1/leaflet-app1-tech-preview.pptx
@@ -134,7 +134,7 @@
           <p:cNvPr id="2" name="タイトル 1">
             <a:extLst>
               <a:ext uri="{FF2B5EF4-FFF2-40B4-BE49-F238E27FC236}">
-                <a16:creationId xmlns:a16="http://schemas.microsoft.com/office/drawing/2014/main" id="{B97A2067-6227-976B-9175-4233115AE575}"/>
+                <a16:creationId xmlns:a16="http://schemas.microsoft.com/office/drawing/2014/main" id="{4953EB64-505C-F14A-3211-18C3F13A7570}"/>
               </a:ext>
             </a:extLst>
           </p:cNvPr>
@@ -171,7 +171,7 @@
           <p:cNvPr id="3" name="字幕 2">
             <a:extLst>
               <a:ext uri="{FF2B5EF4-FFF2-40B4-BE49-F238E27FC236}">
-                <a16:creationId xmlns:a16="http://schemas.microsoft.com/office/drawing/2014/main" id="{69A4D046-67ED-0297-8F68-5E9AC2ED85F3}"/>
+                <a16:creationId xmlns:a16="http://schemas.microsoft.com/office/drawing/2014/main" id="{D4983707-52A3-8A4E-ACFC-651945CEA7EA}"/>
               </a:ext>
             </a:extLst>
           </p:cNvPr>
@@ -241,7 +241,7 @@
           <p:cNvPr id="4" name="日付プレースホルダー 3">
             <a:extLst>
               <a:ext uri="{FF2B5EF4-FFF2-40B4-BE49-F238E27FC236}">
-                <a16:creationId xmlns:a16="http://schemas.microsoft.com/office/drawing/2014/main" id="{91ACDA93-D3BC-3A4F-4BAC-731C2CFEC1A1}"/>
+                <a16:creationId xmlns:a16="http://schemas.microsoft.com/office/drawing/2014/main" id="{E27A0FAF-3745-FC33-9695-B0FF807D5AAE}"/>
               </a:ext>
             </a:extLst>
           </p:cNvPr>
@@ -257,7 +257,7 @@
           <a:bodyPr/>
           <a:lstStyle/>
           <a:p>
-            <a:fld id="{8531775F-8D45-4415-BBEB-373FCD5E289F}" type="datetimeFigureOut">
+            <a:fld id="{AE9D6548-C5E3-492D-A702-05323CE26A99}" type="datetimeFigureOut">
               <a:rPr kumimoji="1" lang="ja-JP" altLang="en-US" smtClean="0"/>
               <a:t>2026/7/30</a:t>
             </a:fld>
@@ -270,7 +270,7 @@
           <p:cNvPr id="5" name="フッター プレースホルダー 4">
             <a:extLst>
               <a:ext uri="{FF2B5EF4-FFF2-40B4-BE49-F238E27FC236}">
-                <a16:creationId xmlns:a16="http://schemas.microsoft.com/office/drawing/2014/main" id="{1B953B6E-1E58-BE9E-701F-1F8A18A2321B}"/>
+                <a16:creationId xmlns:a16="http://schemas.microsoft.com/office/drawing/2014/main" id="{415D0FD6-ECE9-CA81-2877-6A540B324C56}"/>
               </a:ext>
             </a:extLst>
           </p:cNvPr>
@@ -295,7 +295,7 @@
           <p:cNvPr id="6" name="スライド番号プレースホルダー 5">
             <a:extLst>
               <a:ext uri="{FF2B5EF4-FFF2-40B4-BE49-F238E27FC236}">
-                <a16:creationId xmlns:a16="http://schemas.microsoft.com/office/drawing/2014/main" id="{D4FCC8A8-DD21-783F-4669-9A559B1D55BC}"/>
+                <a16:creationId xmlns:a16="http://schemas.microsoft.com/office/drawing/2014/main" id="{F40926B6-CE84-62C2-6523-F02A82F1D93E}"/>
               </a:ext>
             </a:extLst>
           </p:cNvPr>
@@ -311,7 +311,7 @@
           <a:bodyPr/>
           <a:lstStyle/>
           <a:p>
-            <a:fld id="{0980FD42-E451-4C36-9622-B0D11C98EDD7}" type="slidenum">
+            <a:fld id="{4108343C-E8EC-49DB-9DFF-47DF045E7F59}" type="slidenum">
               <a:rPr kumimoji="1" lang="ja-JP" altLang="en-US" smtClean="0"/>
               <a:t>‹#›</a:t>
             </a:fld>
@@ -322,7 +322,7 @@
     </p:spTree>
     <p:extLst>
       <p:ext uri="{BB962C8B-B14F-4D97-AF65-F5344CB8AC3E}">
-        <p14:creationId xmlns:p14="http://schemas.microsoft.com/office/powerpoint/2010/main" val="40504527"/>
+        <p14:creationId xmlns:p14="http://schemas.microsoft.com/office/powerpoint/2010/main" val="1000108443"/>
       </p:ext>
     </p:extLst>
   </p:cSld>
@@ -354,7 +354,7 @@
           <p:cNvPr id="2" name="タイトル 1">
             <a:extLst>
               <a:ext uri="{FF2B5EF4-FFF2-40B4-BE49-F238E27FC236}">
-                <a16:creationId xmlns:a16="http://schemas.microsoft.com/office/drawing/2014/main" id="{A86B0FD9-E42D-10BB-CCC9-B76B1A807468}"/>
+                <a16:creationId xmlns:a16="http://schemas.microsoft.com/office/drawing/2014/main" id="{3ACF83BB-0B10-EE00-E343-3D72C9624AF2}"/>
               </a:ext>
             </a:extLst>
           </p:cNvPr>
@@ -382,7 +382,7 @@
           <p:cNvPr id="3" name="縦書きテキスト プレースホルダー 2">
             <a:extLst>
               <a:ext uri="{FF2B5EF4-FFF2-40B4-BE49-F238E27FC236}">
-                <a16:creationId xmlns:a16="http://schemas.microsoft.com/office/drawing/2014/main" id="{37207AE9-43F3-BED8-11A5-621FE5690D6F}"/>
+                <a16:creationId xmlns:a16="http://schemas.microsoft.com/office/drawing/2014/main" id="{43FDF861-8EA2-1CB5-3F83-48D8F02827F2}"/>
               </a:ext>
             </a:extLst>
           </p:cNvPr>
@@ -471,7 +471,7 @@
           <p:cNvPr id="4" name="日付プレースホルダー 3">
             <a:extLst>
               <a:ext uri="{FF2B5EF4-FFF2-40B4-BE49-F238E27FC236}">
-                <a16:creationId xmlns:a16="http://schemas.microsoft.com/office/drawing/2014/main" id="{26456E8A-65EA-30A9-2918-F3243406BE5E}"/>
+                <a16:creationId xmlns:a16="http://schemas.microsoft.com/office/drawing/2014/main" id="{64076433-263E-DA6B-7914-7B5F33C71BE9}"/>
               </a:ext>
             </a:extLst>
           </p:cNvPr>
@@ -487,7 +487,7 @@
           <a:bodyPr/>
           <a:lstStyle/>
           <a:p>
-            <a:fld id="{8531775F-8D45-4415-BBEB-373FCD5E289F}" type="datetimeFigureOut">
+            <a:fld id="{AE9D6548-C5E3-492D-A702-05323CE26A99}" type="datetimeFigureOut">
               <a:rPr kumimoji="1" lang="ja-JP" altLang="en-US" smtClean="0"/>
               <a:t>2026/7/30</a:t>
             </a:fld>
@@ -500,7 +500,7 @@
           <p:cNvPr id="5" name="フッター プレースホルダー 4">
             <a:extLst>
               <a:ext uri="{FF2B5EF4-FFF2-40B4-BE49-F238E27FC236}">
-                <a16:creationId xmlns:a16="http://schemas.microsoft.com/office/drawing/2014/main" id="{3A329F7C-13B7-823C-A979-ABA8B4CCBB90}"/>
+                <a16:creationId xmlns:a16="http://schemas.microsoft.com/office/drawing/2014/main" id="{6F69DA6B-A707-6248-3BE7-93DB045C45C6}"/>
               </a:ext>
             </a:extLst>
           </p:cNvPr>
@@ -525,7 +525,7 @@
           <p:cNvPr id="6" name="スライド番号プレースホルダー 5">
             <a:extLst>
               <a:ext uri="{FF2B5EF4-FFF2-40B4-BE49-F238E27FC236}">
-                <a16:creationId xmlns:a16="http://schemas.microsoft.com/office/drawing/2014/main" id="{B1BBB5B4-4F49-D1C8-F075-6B3A3EEF29DD}"/>
+                <a16:creationId xmlns:a16="http://schemas.microsoft.com/office/drawing/2014/main" id="{8B597C26-CCD3-1DEB-FFE2-8D7DE3FEE324}"/>
               </a:ext>
             </a:extLst>
           </p:cNvPr>
@@ -541,7 +541,7 @@
           <a:bodyPr/>
           <a:lstStyle/>
           <a:p>
-            <a:fld id="{0980FD42-E451-4C36-9622-B0D11C98EDD7}" type="slidenum">
+            <a:fld id="{4108343C-E8EC-49DB-9DFF-47DF045E7F59}" type="slidenum">
               <a:rPr kumimoji="1" lang="ja-JP" altLang="en-US" smtClean="0"/>
               <a:t>‹#›</a:t>
             </a:fld>
@@ -552,7 +552,7 @@
     </p:spTree>
     <p:extLst>
       <p:ext uri="{BB962C8B-B14F-4D97-AF65-F5344CB8AC3E}">
-        <p14:creationId xmlns:p14="http://schemas.microsoft.com/office/powerpoint/2010/main" val="1735287216"/>
+        <p14:creationId xmlns:p14="http://schemas.microsoft.com/office/powerpoint/2010/main" val="2446234123"/>
       </p:ext>
     </p:extLst>
   </p:cSld>
@@ -584,7 +584,7 @@
           <p:cNvPr id="2" name="縦書きタイトル 1">
             <a:extLst>
               <a:ext uri="{FF2B5EF4-FFF2-40B4-BE49-F238E27FC236}">
-                <a16:creationId xmlns:a16="http://schemas.microsoft.com/office/drawing/2014/main" id="{E971DC9B-D2C9-E072-F369-8C20D32232CC}"/>
+                <a16:creationId xmlns:a16="http://schemas.microsoft.com/office/drawing/2014/main" id="{75EFF464-DADA-BE92-BEA4-EF111D318496}"/>
               </a:ext>
             </a:extLst>
           </p:cNvPr>
@@ -617,7 +617,7 @@
           <p:cNvPr id="3" name="縦書きテキスト プレースホルダー 2">
             <a:extLst>
               <a:ext uri="{FF2B5EF4-FFF2-40B4-BE49-F238E27FC236}">
-                <a16:creationId xmlns:a16="http://schemas.microsoft.com/office/drawing/2014/main" id="{E2A35E63-A3A0-A8F6-E55E-361862E8AC51}"/>
+                <a16:creationId xmlns:a16="http://schemas.microsoft.com/office/drawing/2014/main" id="{36343342-26C3-7695-5386-283B77D4D1D0}"/>
               </a:ext>
             </a:extLst>
           </p:cNvPr>
@@ -711,7 +711,7 @@
           <p:cNvPr id="4" name="日付プレースホルダー 3">
             <a:extLst>
               <a:ext uri="{FF2B5EF4-FFF2-40B4-BE49-F238E27FC236}">
-                <a16:creationId xmlns:a16="http://schemas.microsoft.com/office/drawing/2014/main" id="{F8A82603-B2DE-BB3C-4FF5-3B5EE32C5295}"/>
+                <a16:creationId xmlns:a16="http://schemas.microsoft.com/office/drawing/2014/main" id="{721C31A0-8968-E501-0568-98449673CFCC}"/>
               </a:ext>
             </a:extLst>
           </p:cNvPr>
@@ -727,7 +727,7 @@
           <a:bodyPr/>
           <a:lstStyle/>
           <a:p>
-            <a:fld id="{8531775F-8D45-4415-BBEB-373FCD5E289F}" type="datetimeFigureOut">
+            <a:fld id="{AE9D6548-C5E3-492D-A702-05323CE26A99}" type="datetimeFigureOut">
               <a:rPr kumimoji="1" lang="ja-JP" altLang="en-US" smtClean="0"/>
               <a:t>2026/7/30</a:t>
             </a:fld>
@@ -740,7 +740,7 @@
           <p:cNvPr id="5" name="フッター プレースホルダー 4">
             <a:extLst>
               <a:ext uri="{FF2B5EF4-FFF2-40B4-BE49-F238E27FC236}">
-                <a16:creationId xmlns:a16="http://schemas.microsoft.com/office/drawing/2014/main" id="{2D2B67AB-BC89-44D1-BA99-F3DE890E3BBD}"/>
+                <a16:creationId xmlns:a16="http://schemas.microsoft.com/office/drawing/2014/main" id="{BE108824-C348-803D-BFE7-E2335D2EA684}"/>
               </a:ext>
             </a:extLst>
           </p:cNvPr>
@@ -765,7 +765,7 @@
           <p:cNvPr id="6" name="スライド番号プレースホルダー 5">
             <a:extLst>
               <a:ext uri="{FF2B5EF4-FFF2-40B4-BE49-F238E27FC236}">
-                <a16:creationId xmlns:a16="http://schemas.microsoft.com/office/drawing/2014/main" id="{EBAD2F31-AA28-76D2-D0BD-0BF11D82C69E}"/>
+                <a16:creationId xmlns:a16="http://schemas.microsoft.com/office/drawing/2014/main" id="{F5B5E391-8091-F857-A505-782889239CED}"/>
               </a:ext>
             </a:extLst>
           </p:cNvPr>
@@ -781,7 +781,7 @@
           <a:bodyPr/>
           <a:lstStyle/>
           <a:p>
-            <a:fld id="{0980FD42-E451-4C36-9622-B0D11C98EDD7}" type="slidenum">
+            <a:fld id="{4108343C-E8EC-49DB-9DFF-47DF045E7F59}" type="slidenum">
               <a:rPr kumimoji="1" lang="ja-JP" altLang="en-US" smtClean="0"/>
               <a:t>‹#›</a:t>
             </a:fld>
@@ -792,7 +792,7 @@
     </p:spTree>
     <p:extLst>
       <p:ext uri="{BB962C8B-B14F-4D97-AF65-F5344CB8AC3E}">
-        <p14:creationId xmlns:p14="http://schemas.microsoft.com/office/powerpoint/2010/main" val="1628831693"/>
+        <p14:creationId xmlns:p14="http://schemas.microsoft.com/office/powerpoint/2010/main" val="4852468"/>
       </p:ext>
     </p:extLst>
   </p:cSld>
@@ -824,7 +824,7 @@
           <p:cNvPr id="2" name="タイトル 1">
             <a:extLst>
               <a:ext uri="{FF2B5EF4-FFF2-40B4-BE49-F238E27FC236}">
-                <a16:creationId xmlns:a16="http://schemas.microsoft.com/office/drawing/2014/main" id="{B13E3FD1-23E7-E507-DFBE-572209F11653}"/>
+                <a16:creationId xmlns:a16="http://schemas.microsoft.com/office/drawing/2014/main" id="{D55ACA4D-9738-272A-5B1A-DE68BA4A4E1E}"/>
               </a:ext>
             </a:extLst>
           </p:cNvPr>
@@ -852,7 +852,7 @@
           <p:cNvPr id="3" name="コンテンツ プレースホルダー 2">
             <a:extLst>
               <a:ext uri="{FF2B5EF4-FFF2-40B4-BE49-F238E27FC236}">
-                <a16:creationId xmlns:a16="http://schemas.microsoft.com/office/drawing/2014/main" id="{64709D94-57D9-C15D-B993-0ED5E0BAB07B}"/>
+                <a16:creationId xmlns:a16="http://schemas.microsoft.com/office/drawing/2014/main" id="{5CBB6B40-4037-7617-FA30-CEEE61160E2C}"/>
               </a:ext>
             </a:extLst>
           </p:cNvPr>
@@ -941,7 +941,7 @@
           <p:cNvPr id="4" name="日付プレースホルダー 3">
             <a:extLst>
               <a:ext uri="{FF2B5EF4-FFF2-40B4-BE49-F238E27FC236}">
-                <a16:creationId xmlns:a16="http://schemas.microsoft.com/office/drawing/2014/main" id="{91C6B7D5-BE15-A5C8-10BD-EC99053F5755}"/>
+                <a16:creationId xmlns:a16="http://schemas.microsoft.com/office/drawing/2014/main" id="{12F4B69A-55C5-0EB7-53FA-88C58E570A08}"/>
               </a:ext>
             </a:extLst>
           </p:cNvPr>
@@ -957,7 +957,7 @@
           <a:bodyPr/>
           <a:lstStyle/>
           <a:p>
-            <a:fld id="{8531775F-8D45-4415-BBEB-373FCD5E289F}" type="datetimeFigureOut">
+            <a:fld id="{AE9D6548-C5E3-492D-A702-05323CE26A99}" type="datetimeFigureOut">
               <a:rPr kumimoji="1" lang="ja-JP" altLang="en-US" smtClean="0"/>
               <a:t>2026/7/30</a:t>
             </a:fld>
@@ -970,7 +970,7 @@
           <p:cNvPr id="5" name="フッター プレースホルダー 4">
             <a:extLst>
               <a:ext uri="{FF2B5EF4-FFF2-40B4-BE49-F238E27FC236}">
-                <a16:creationId xmlns:a16="http://schemas.microsoft.com/office/drawing/2014/main" id="{6D589B3E-3E52-8FE2-F5FF-B64243478DA1}"/>
+                <a16:creationId xmlns:a16="http://schemas.microsoft.com/office/drawing/2014/main" id="{097E32C5-5FEE-9E5A-3D6F-A8E6BCD84881}"/>
               </a:ext>
             </a:extLst>
           </p:cNvPr>
@@ -995,7 +995,7 @@
           <p:cNvPr id="6" name="スライド番号プレースホルダー 5">
             <a:extLst>
               <a:ext uri="{FF2B5EF4-FFF2-40B4-BE49-F238E27FC236}">
-                <a16:creationId xmlns:a16="http://schemas.microsoft.com/office/drawing/2014/main" id="{74791911-6162-A6EA-E2FD-BDBEE8DAB78A}"/>
+                <a16:creationId xmlns:a16="http://schemas.microsoft.com/office/drawing/2014/main" id="{254F3038-DCBD-22B2-9D0E-F76CACAC6B1A}"/>
               </a:ext>
             </a:extLst>
           </p:cNvPr>
@@ -1011,7 +1011,7 @@
           <a:bodyPr/>
           <a:lstStyle/>
           <a:p>
-            <a:fld id="{0980FD42-E451-4C36-9622-B0D11C98EDD7}" type="slidenum">
+            <a:fld id="{4108343C-E8EC-49DB-9DFF-47DF045E7F59}" type="slidenum">
               <a:rPr kumimoji="1" lang="ja-JP" altLang="en-US" smtClean="0"/>
               <a:t>‹#›</a:t>
             </a:fld>
@@ -1022,7 +1022,7 @@
     </p:spTree>
     <p:extLst>
       <p:ext uri="{BB962C8B-B14F-4D97-AF65-F5344CB8AC3E}">
-        <p14:creationId xmlns:p14="http://schemas.microsoft.com/office/powerpoint/2010/main" val="2575512055"/>
+        <p14:creationId xmlns:p14="http://schemas.microsoft.com/office/powerpoint/2010/main" val="3308374354"/>
       </p:ext>
     </p:extLst>
   </p:cSld>
@@ -1054,7 +1054,7 @@
           <p:cNvPr id="2" name="タイトル 1">
             <a:extLst>
               <a:ext uri="{FF2B5EF4-FFF2-40B4-BE49-F238E27FC236}">
-                <a16:creationId xmlns:a16="http://schemas.microsoft.com/office/drawing/2014/main" id="{1029463B-E69B-A6F9-4468-D9C0042A2BC5}"/>
+                <a16:creationId xmlns:a16="http://schemas.microsoft.com/office/drawing/2014/main" id="{56453371-3196-950A-6B95-478A72D1ACAE}"/>
               </a:ext>
             </a:extLst>
           </p:cNvPr>
@@ -1091,7 +1091,7 @@
           <p:cNvPr id="3" name="テキスト プレースホルダー 2">
             <a:extLst>
               <a:ext uri="{FF2B5EF4-FFF2-40B4-BE49-F238E27FC236}">
-                <a16:creationId xmlns:a16="http://schemas.microsoft.com/office/drawing/2014/main" id="{03FBFC9A-DB1C-83EB-32F5-EF64F8B6FC66}"/>
+                <a16:creationId xmlns:a16="http://schemas.microsoft.com/office/drawing/2014/main" id="{4A9BE2DF-55FB-70C3-6DDE-E12F6A62D5B0}"/>
               </a:ext>
             </a:extLst>
           </p:cNvPr>
@@ -1216,7 +1216,7 @@
           <p:cNvPr id="4" name="日付プレースホルダー 3">
             <a:extLst>
               <a:ext uri="{FF2B5EF4-FFF2-40B4-BE49-F238E27FC236}">
-                <a16:creationId xmlns:a16="http://schemas.microsoft.com/office/drawing/2014/main" id="{D2947EC8-2ED1-1B99-ED59-3B7C6E1A35EF}"/>
+                <a16:creationId xmlns:a16="http://schemas.microsoft.com/office/drawing/2014/main" id="{67E16C10-4F50-A26D-2C45-7CBB1B96D780}"/>
               </a:ext>
             </a:extLst>
           </p:cNvPr>
@@ -1232,7 +1232,7 @@
           <a:bodyPr/>
           <a:lstStyle/>
           <a:p>
-            <a:fld id="{8531775F-8D45-4415-BBEB-373FCD5E289F}" type="datetimeFigureOut">
+            <a:fld id="{AE9D6548-C5E3-492D-A702-05323CE26A99}" type="datetimeFigureOut">
               <a:rPr kumimoji="1" lang="ja-JP" altLang="en-US" smtClean="0"/>
               <a:t>2026/7/30</a:t>
             </a:fld>
@@ -1245,7 +1245,7 @@
           <p:cNvPr id="5" name="フッター プレースホルダー 4">
             <a:extLst>
               <a:ext uri="{FF2B5EF4-FFF2-40B4-BE49-F238E27FC236}">
-                <a16:creationId xmlns:a16="http://schemas.microsoft.com/office/drawing/2014/main" id="{6DD4832E-8392-A1C2-A5A5-0DF920638EB9}"/>
+                <a16:creationId xmlns:a16="http://schemas.microsoft.com/office/drawing/2014/main" id="{81A1BDD7-B60D-009E-FFC6-9F58CA459119}"/>
               </a:ext>
             </a:extLst>
           </p:cNvPr>
@@ -1270,7 +1270,7 @@
           <p:cNvPr id="6" name="スライド番号プレースホルダー 5">
             <a:extLst>
               <a:ext uri="{FF2B5EF4-FFF2-40B4-BE49-F238E27FC236}">
-                <a16:creationId xmlns:a16="http://schemas.microsoft.com/office/drawing/2014/main" id="{A3682458-36D2-B412-437F-BF1630F7B60B}"/>
+                <a16:creationId xmlns:a16="http://schemas.microsoft.com/office/drawing/2014/main" id="{52E0E977-77E7-1BD1-354D-45594C1A949F}"/>
               </a:ext>
             </a:extLst>
           </p:cNvPr>
@@ -1286,7 +1286,7 @@
           <a:bodyPr/>
           <a:lstStyle/>
           <a:p>
-            <a:fld id="{0980FD42-E451-4C36-9622-B0D11C98EDD7}" type="slidenum">
+            <a:fld id="{4108343C-E8EC-49DB-9DFF-47DF045E7F59}" type="slidenum">
               <a:rPr kumimoji="1" lang="ja-JP" altLang="en-US" smtClean="0"/>
               <a:t>‹#›</a:t>
             </a:fld>
@@ -1297,7 +1297,7 @@
     </p:spTree>
     <p:extLst>
       <p:ext uri="{BB962C8B-B14F-4D97-AF65-F5344CB8AC3E}">
-        <p14:creationId xmlns:p14="http://schemas.microsoft.com/office/powerpoint/2010/main" val="3429362991"/>
+        <p14:creationId xmlns:p14="http://schemas.microsoft.com/office/powerpoint/2010/main" val="629572458"/>
       </p:ext>
     </p:extLst>
   </p:cSld>
@@ -1329,7 +1329,7 @@
           <p:cNvPr id="2" name="タイトル 1">
             <a:extLst>
               <a:ext uri="{FF2B5EF4-FFF2-40B4-BE49-F238E27FC236}">
-                <a16:creationId xmlns:a16="http://schemas.microsoft.com/office/drawing/2014/main" id="{3B68B2D3-5DCD-3B9C-AF99-832ACC4C2E87}"/>
+                <a16:creationId xmlns:a16="http://schemas.microsoft.com/office/drawing/2014/main" id="{900D7547-012C-B122-3192-DECCC44F7E21}"/>
               </a:ext>
             </a:extLst>
           </p:cNvPr>
@@ -1357,7 +1357,7 @@
           <p:cNvPr id="3" name="コンテンツ プレースホルダー 2">
             <a:extLst>
               <a:ext uri="{FF2B5EF4-FFF2-40B4-BE49-F238E27FC236}">
-                <a16:creationId xmlns:a16="http://schemas.microsoft.com/office/drawing/2014/main" id="{93BADA71-0481-E28C-ADA7-3D9FDA60FA59}"/>
+                <a16:creationId xmlns:a16="http://schemas.microsoft.com/office/drawing/2014/main" id="{98A405AC-FD5F-83C9-8131-2CA332EC826C}"/>
               </a:ext>
             </a:extLst>
           </p:cNvPr>
@@ -1451,7 +1451,7 @@
           <p:cNvPr id="4" name="コンテンツ プレースホルダー 3">
             <a:extLst>
               <a:ext uri="{FF2B5EF4-FFF2-40B4-BE49-F238E27FC236}">
-                <a16:creationId xmlns:a16="http://schemas.microsoft.com/office/drawing/2014/main" id="{CA3B77AD-CDBF-9532-77BC-090E7C7A06D7}"/>
+                <a16:creationId xmlns:a16="http://schemas.microsoft.com/office/drawing/2014/main" id="{9E3C1A34-646B-957D-0D86-26E5A00B5ED3}"/>
               </a:ext>
             </a:extLst>
           </p:cNvPr>
@@ -1545,7 +1545,7 @@
           <p:cNvPr id="5" name="日付プレースホルダー 4">
             <a:extLst>
               <a:ext uri="{FF2B5EF4-FFF2-40B4-BE49-F238E27FC236}">
-                <a16:creationId xmlns:a16="http://schemas.microsoft.com/office/drawing/2014/main" id="{CF01AD25-2534-FDC6-5EAB-36F23BB80231}"/>
+                <a16:creationId xmlns:a16="http://schemas.microsoft.com/office/drawing/2014/main" id="{F9C0FBCB-0978-0948-55C6-1D7AE1628179}"/>
               </a:ext>
             </a:extLst>
           </p:cNvPr>
@@ -1561,7 +1561,7 @@
           <a:bodyPr/>
           <a:lstStyle/>
           <a:p>
-            <a:fld id="{8531775F-8D45-4415-BBEB-373FCD5E289F}" type="datetimeFigureOut">
+            <a:fld id="{AE9D6548-C5E3-492D-A702-05323CE26A99}" type="datetimeFigureOut">
               <a:rPr kumimoji="1" lang="ja-JP" altLang="en-US" smtClean="0"/>
               <a:t>2026/7/30</a:t>
             </a:fld>
@@ -1574,7 +1574,7 @@
           <p:cNvPr id="6" name="フッター プレースホルダー 5">
             <a:extLst>
               <a:ext uri="{FF2B5EF4-FFF2-40B4-BE49-F238E27FC236}">
-                <a16:creationId xmlns:a16="http://schemas.microsoft.com/office/drawing/2014/main" id="{C292825A-A0DE-7CA3-2E58-18573234705F}"/>
+                <a16:creationId xmlns:a16="http://schemas.microsoft.com/office/drawing/2014/main" id="{D0C4C211-709B-4841-22BE-8B916428B516}"/>
               </a:ext>
             </a:extLst>
           </p:cNvPr>
@@ -1599,7 +1599,7 @@
           <p:cNvPr id="7" name="スライド番号プレースホルダー 6">
             <a:extLst>
               <a:ext uri="{FF2B5EF4-FFF2-40B4-BE49-F238E27FC236}">
-                <a16:creationId xmlns:a16="http://schemas.microsoft.com/office/drawing/2014/main" id="{BBD3EB04-95D3-D51B-3579-A0B923EC13DF}"/>
+                <a16:creationId xmlns:a16="http://schemas.microsoft.com/office/drawing/2014/main" id="{5D92F5FA-2193-6754-31E0-2E4ED1F4A344}"/>
               </a:ext>
             </a:extLst>
           </p:cNvPr>
@@ -1615,7 +1615,7 @@
           <a:bodyPr/>
           <a:lstStyle/>
           <a:p>
-            <a:fld id="{0980FD42-E451-4C36-9622-B0D11C98EDD7}" type="slidenum">
+            <a:fld id="{4108343C-E8EC-49DB-9DFF-47DF045E7F59}" type="slidenum">
               <a:rPr kumimoji="1" lang="ja-JP" altLang="en-US" smtClean="0"/>
               <a:t>‹#›</a:t>
             </a:fld>
@@ -1626,7 +1626,7 @@
     </p:spTree>
     <p:extLst>
       <p:ext uri="{BB962C8B-B14F-4D97-AF65-F5344CB8AC3E}">
-        <p14:creationId xmlns:p14="http://schemas.microsoft.com/office/powerpoint/2010/main" val="2236837961"/>
+        <p14:creationId xmlns:p14="http://schemas.microsoft.com/office/powerpoint/2010/main" val="3563430291"/>
       </p:ext>
     </p:extLst>
   </p:cSld>
@@ -1658,7 +1658,7 @@
           <p:cNvPr id="2" name="タイトル 1">
             <a:extLst>
               <a:ext uri="{FF2B5EF4-FFF2-40B4-BE49-F238E27FC236}">
-                <a16:creationId xmlns:a16="http://schemas.microsoft.com/office/drawing/2014/main" id="{EF58DE29-2F8E-042B-7BE8-E5D293CA7A2E}"/>
+                <a16:creationId xmlns:a16="http://schemas.microsoft.com/office/drawing/2014/main" id="{34A88AEE-5CA0-FA20-8FF8-B00459F1C92E}"/>
               </a:ext>
             </a:extLst>
           </p:cNvPr>
@@ -1691,7 +1691,7 @@
           <p:cNvPr id="3" name="テキスト プレースホルダー 2">
             <a:extLst>
               <a:ext uri="{FF2B5EF4-FFF2-40B4-BE49-F238E27FC236}">
-                <a16:creationId xmlns:a16="http://schemas.microsoft.com/office/drawing/2014/main" id="{85361639-C506-AD4B-56EF-C7F8A14AB6A7}"/>
+                <a16:creationId xmlns:a16="http://schemas.microsoft.com/office/drawing/2014/main" id="{778797AD-A0F9-4F00-A97B-71D1C4F61317}"/>
               </a:ext>
             </a:extLst>
           </p:cNvPr>
@@ -1762,7 +1762,7 @@
           <p:cNvPr id="4" name="コンテンツ プレースホルダー 3">
             <a:extLst>
               <a:ext uri="{FF2B5EF4-FFF2-40B4-BE49-F238E27FC236}">
-                <a16:creationId xmlns:a16="http://schemas.microsoft.com/office/drawing/2014/main" id="{15EFFFF7-C720-97CC-6BA9-27ACD0017461}"/>
+                <a16:creationId xmlns:a16="http://schemas.microsoft.com/office/drawing/2014/main" id="{290D01D1-165B-DF0A-E9FB-28A3484EE89D}"/>
               </a:ext>
             </a:extLst>
           </p:cNvPr>
@@ -1856,7 +1856,7 @@
           <p:cNvPr id="5" name="テキスト プレースホルダー 4">
             <a:extLst>
               <a:ext uri="{FF2B5EF4-FFF2-40B4-BE49-F238E27FC236}">
-                <a16:creationId xmlns:a16="http://schemas.microsoft.com/office/drawing/2014/main" id="{9B9D23C5-C72F-5CA3-90CC-BDDA1DD8BBF6}"/>
+                <a16:creationId xmlns:a16="http://schemas.microsoft.com/office/drawing/2014/main" id="{07508608-9126-5323-8AFC-930E70C36424}"/>
               </a:ext>
             </a:extLst>
           </p:cNvPr>
@@ -1927,7 +1927,7 @@
           <p:cNvPr id="6" name="コンテンツ プレースホルダー 5">
             <a:extLst>
               <a:ext uri="{FF2B5EF4-FFF2-40B4-BE49-F238E27FC236}">
-                <a16:creationId xmlns:a16="http://schemas.microsoft.com/office/drawing/2014/main" id="{FC81CC5B-B06F-ABB2-473A-DC823C551885}"/>
+                <a16:creationId xmlns:a16="http://schemas.microsoft.com/office/drawing/2014/main" id="{2B06A077-AD20-DD2D-D137-A78529CF6463}"/>
               </a:ext>
             </a:extLst>
           </p:cNvPr>
@@ -2021,7 +2021,7 @@
           <p:cNvPr id="7" name="日付プレースホルダー 6">
             <a:extLst>
               <a:ext uri="{FF2B5EF4-FFF2-40B4-BE49-F238E27FC236}">
-                <a16:creationId xmlns:a16="http://schemas.microsoft.com/office/drawing/2014/main" id="{57263D6A-D7D5-FBF7-4183-D2D1DA825FA4}"/>
+                <a16:creationId xmlns:a16="http://schemas.microsoft.com/office/drawing/2014/main" id="{6BC3106E-F7E9-1AD3-2B04-A2C9C856D478}"/>
               </a:ext>
             </a:extLst>
           </p:cNvPr>
@@ -2037,7 +2037,7 @@
           <a:bodyPr/>
           <a:lstStyle/>
           <a:p>
-            <a:fld id="{8531775F-8D45-4415-BBEB-373FCD5E289F}" type="datetimeFigureOut">
+            <a:fld id="{AE9D6548-C5E3-492D-A702-05323CE26A99}" type="datetimeFigureOut">
               <a:rPr kumimoji="1" lang="ja-JP" altLang="en-US" smtClean="0"/>
               <a:t>2026/7/30</a:t>
             </a:fld>
@@ -2050,7 +2050,7 @@
           <p:cNvPr id="8" name="フッター プレースホルダー 7">
             <a:extLst>
               <a:ext uri="{FF2B5EF4-FFF2-40B4-BE49-F238E27FC236}">
-                <a16:creationId xmlns:a16="http://schemas.microsoft.com/office/drawing/2014/main" id="{2CCA4E03-BFE5-89E6-4ACE-9B600AB608DF}"/>
+                <a16:creationId xmlns:a16="http://schemas.microsoft.com/office/drawing/2014/main" id="{2D0BF858-56A4-7EDB-88B9-325C91F6FEFD}"/>
               </a:ext>
             </a:extLst>
           </p:cNvPr>
@@ -2075,7 +2075,7 @@
           <p:cNvPr id="9" name="スライド番号プレースホルダー 8">
             <a:extLst>
               <a:ext uri="{FF2B5EF4-FFF2-40B4-BE49-F238E27FC236}">
-                <a16:creationId xmlns:a16="http://schemas.microsoft.com/office/drawing/2014/main" id="{17002095-7ABA-F8D0-D673-A98937D06153}"/>
+                <a16:creationId xmlns:a16="http://schemas.microsoft.com/office/drawing/2014/main" id="{4A60781F-3D20-E86C-F437-F4A87F8853EE}"/>
               </a:ext>
             </a:extLst>
           </p:cNvPr>
@@ -2091,7 +2091,7 @@
           <a:bodyPr/>
           <a:lstStyle/>
           <a:p>
-            <a:fld id="{0980FD42-E451-4C36-9622-B0D11C98EDD7}" type="slidenum">
+            <a:fld id="{4108343C-E8EC-49DB-9DFF-47DF045E7F59}" type="slidenum">
               <a:rPr kumimoji="1" lang="ja-JP" altLang="en-US" smtClean="0"/>
               <a:t>‹#›</a:t>
             </a:fld>
@@ -2102,7 +2102,7 @@
     </p:spTree>
     <p:extLst>
       <p:ext uri="{BB962C8B-B14F-4D97-AF65-F5344CB8AC3E}">
-        <p14:creationId xmlns:p14="http://schemas.microsoft.com/office/powerpoint/2010/main" val="3819212235"/>
+        <p14:creationId xmlns:p14="http://schemas.microsoft.com/office/powerpoint/2010/main" val="544501239"/>
       </p:ext>
     </p:extLst>
   </p:cSld>
@@ -2134,7 +2134,7 @@
           <p:cNvPr id="2" name="タイトル 1">
             <a:extLst>
               <a:ext uri="{FF2B5EF4-FFF2-40B4-BE49-F238E27FC236}">
-                <a16:creationId xmlns:a16="http://schemas.microsoft.com/office/drawing/2014/main" id="{83CC5FD9-6567-101E-EAF6-EEEE5E90A05A}"/>
+                <a16:creationId xmlns:a16="http://schemas.microsoft.com/office/drawing/2014/main" id="{C986E393-DA3B-226E-0C10-B5BFEC06CF92}"/>
               </a:ext>
             </a:extLst>
           </p:cNvPr>
@@ -2162,7 +2162,7 @@
           <p:cNvPr id="3" name="日付プレースホルダー 2">
             <a:extLst>
               <a:ext uri="{FF2B5EF4-FFF2-40B4-BE49-F238E27FC236}">
-                <a16:creationId xmlns:a16="http://schemas.microsoft.com/office/drawing/2014/main" id="{E8B010D0-EC53-868F-E6EA-65AFD6DC9798}"/>
+                <a16:creationId xmlns:a16="http://schemas.microsoft.com/office/drawing/2014/main" id="{4F958218-ADA8-3205-B0F5-DE7E8FCFB438}"/>
               </a:ext>
             </a:extLst>
           </p:cNvPr>
@@ -2178,7 +2178,7 @@
           <a:bodyPr/>
           <a:lstStyle/>
           <a:p>
-            <a:fld id="{8531775F-8D45-4415-BBEB-373FCD5E289F}" type="datetimeFigureOut">
+            <a:fld id="{AE9D6548-C5E3-492D-A702-05323CE26A99}" type="datetimeFigureOut">
               <a:rPr kumimoji="1" lang="ja-JP" altLang="en-US" smtClean="0"/>
               <a:t>2026/7/30</a:t>
             </a:fld>
@@ -2191,7 +2191,7 @@
           <p:cNvPr id="4" name="フッター プレースホルダー 3">
             <a:extLst>
               <a:ext uri="{FF2B5EF4-FFF2-40B4-BE49-F238E27FC236}">
-                <a16:creationId xmlns:a16="http://schemas.microsoft.com/office/drawing/2014/main" id="{29D9A13A-7DEB-F797-F7F0-E7DA996187CB}"/>
+                <a16:creationId xmlns:a16="http://schemas.microsoft.com/office/drawing/2014/main" id="{7662AE5B-AC16-C5CB-0049-1193FC075C76}"/>
               </a:ext>
             </a:extLst>
           </p:cNvPr>
@@ -2216,7 +2216,7 @@
           <p:cNvPr id="5" name="スライド番号プレースホルダー 4">
             <a:extLst>
               <a:ext uri="{FF2B5EF4-FFF2-40B4-BE49-F238E27FC236}">
-                <a16:creationId xmlns:a16="http://schemas.microsoft.com/office/drawing/2014/main" id="{F83E5FD5-099D-523D-70E4-195EC7BD6CA1}"/>
+                <a16:creationId xmlns:a16="http://schemas.microsoft.com/office/drawing/2014/main" id="{5403FF3D-8899-9D5C-D5BC-5C947EFC1B06}"/>
               </a:ext>
             </a:extLst>
           </p:cNvPr>
@@ -2232,7 +2232,7 @@
           <a:bodyPr/>
           <a:lstStyle/>
           <a:p>
-            <a:fld id="{0980FD42-E451-4C36-9622-B0D11C98EDD7}" type="slidenum">
+            <a:fld id="{4108343C-E8EC-49DB-9DFF-47DF045E7F59}" type="slidenum">
               <a:rPr kumimoji="1" lang="ja-JP" altLang="en-US" smtClean="0"/>
               <a:t>‹#›</a:t>
             </a:fld>
@@ -2243,7 +2243,7 @@
     </p:spTree>
     <p:extLst>
       <p:ext uri="{BB962C8B-B14F-4D97-AF65-F5344CB8AC3E}">
-        <p14:creationId xmlns:p14="http://schemas.microsoft.com/office/powerpoint/2010/main" val="770214360"/>
+        <p14:creationId xmlns:p14="http://schemas.microsoft.com/office/powerpoint/2010/main" val="2744817409"/>
       </p:ext>
     </p:extLst>
   </p:cSld>
@@ -2275,7 +2275,7 @@
           <p:cNvPr id="2" name="日付プレースホルダー 1">
             <a:extLst>
               <a:ext uri="{FF2B5EF4-FFF2-40B4-BE49-F238E27FC236}">
-                <a16:creationId xmlns:a16="http://schemas.microsoft.com/office/drawing/2014/main" id="{14BC6B92-690F-0F33-4F4B-E72838F3AF3E}"/>
+                <a16:creationId xmlns:a16="http://schemas.microsoft.com/office/drawing/2014/main" id="{F67BCB68-E558-BAE9-8C03-57FEE3AB362F}"/>
               </a:ext>
             </a:extLst>
           </p:cNvPr>
@@ -2291,7 +2291,7 @@
           <a:bodyPr/>
           <a:lstStyle/>
           <a:p>
-            <a:fld id="{8531775F-8D45-4415-BBEB-373FCD5E289F}" type="datetimeFigureOut">
+            <a:fld id="{AE9D6548-C5E3-492D-A702-05323CE26A99}" type="datetimeFigureOut">
               <a:rPr kumimoji="1" lang="ja-JP" altLang="en-US" smtClean="0"/>
               <a:t>2026/7/30</a:t>
             </a:fld>
@@ -2304,7 +2304,7 @@
           <p:cNvPr id="3" name="フッター プレースホルダー 2">
             <a:extLst>
               <a:ext uri="{FF2B5EF4-FFF2-40B4-BE49-F238E27FC236}">
-                <a16:creationId xmlns:a16="http://schemas.microsoft.com/office/drawing/2014/main" id="{4F2DA4DB-6816-02D7-A5F5-D73ABA466177}"/>
+                <a16:creationId xmlns:a16="http://schemas.microsoft.com/office/drawing/2014/main" id="{6B88E624-9781-FCD6-3347-9D19E6860A08}"/>
               </a:ext>
             </a:extLst>
           </p:cNvPr>
@@ -2329,7 +2329,7 @@
           <p:cNvPr id="4" name="スライド番号プレースホルダー 3">
             <a:extLst>
               <a:ext uri="{FF2B5EF4-FFF2-40B4-BE49-F238E27FC236}">
-                <a16:creationId xmlns:a16="http://schemas.microsoft.com/office/drawing/2014/main" id="{8AFC6C33-4226-1620-3C10-4BCEC1EBB2AA}"/>
+                <a16:creationId xmlns:a16="http://schemas.microsoft.com/office/drawing/2014/main" id="{307EEC4D-86A5-E97B-6363-3073D5CF260B}"/>
               </a:ext>
             </a:extLst>
           </p:cNvPr>
@@ -2345,7 +2345,7 @@
           <a:bodyPr/>
           <a:lstStyle/>
           <a:p>
-            <a:fld id="{0980FD42-E451-4C36-9622-B0D11C98EDD7}" type="slidenum">
+            <a:fld id="{4108343C-E8EC-49DB-9DFF-47DF045E7F59}" type="slidenum">
               <a:rPr kumimoji="1" lang="ja-JP" altLang="en-US" smtClean="0"/>
               <a:t>‹#›</a:t>
             </a:fld>
@@ -2356,7 +2356,7 @@
     </p:spTree>
     <p:extLst>
       <p:ext uri="{BB962C8B-B14F-4D97-AF65-F5344CB8AC3E}">
-        <p14:creationId xmlns:p14="http://schemas.microsoft.com/office/powerpoint/2010/main" val="144345207"/>
+        <p14:creationId xmlns:p14="http://schemas.microsoft.com/office/powerpoint/2010/main" val="548447470"/>
       </p:ext>
     </p:extLst>
   </p:cSld>
@@ -2388,7 +2388,7 @@
           <p:cNvPr id="2" name="タイトル 1">
             <a:extLst>
               <a:ext uri="{FF2B5EF4-FFF2-40B4-BE49-F238E27FC236}">
-                <a16:creationId xmlns:a16="http://schemas.microsoft.com/office/drawing/2014/main" id="{4B191C8E-F1CB-630C-5352-BBCF1D40F31C}"/>
+                <a16:creationId xmlns:a16="http://schemas.microsoft.com/office/drawing/2014/main" id="{F69FC341-8060-39A0-4A9B-AD9A68713B1C}"/>
               </a:ext>
             </a:extLst>
           </p:cNvPr>
@@ -2425,7 +2425,7 @@
           <p:cNvPr id="3" name="コンテンツ プレースホルダー 2">
             <a:extLst>
               <a:ext uri="{FF2B5EF4-FFF2-40B4-BE49-F238E27FC236}">
-                <a16:creationId xmlns:a16="http://schemas.microsoft.com/office/drawing/2014/main" id="{D7F8AFD4-6D5B-6A10-2EF1-5EACD7976AFC}"/>
+                <a16:creationId xmlns:a16="http://schemas.microsoft.com/office/drawing/2014/main" id="{94D4AE87-93B4-CC4D-E191-5F4D97FD4A76}"/>
               </a:ext>
             </a:extLst>
           </p:cNvPr>
@@ -2547,7 +2547,7 @@
           <p:cNvPr id="4" name="テキスト プレースホルダー 3">
             <a:extLst>
               <a:ext uri="{FF2B5EF4-FFF2-40B4-BE49-F238E27FC236}">
-                <a16:creationId xmlns:a16="http://schemas.microsoft.com/office/drawing/2014/main" id="{594A8298-EBA9-3E2A-C681-A7377EAA8DCB}"/>
+                <a16:creationId xmlns:a16="http://schemas.microsoft.com/office/drawing/2014/main" id="{A7D8DE86-DCB9-5E42-7261-5F4F20A809B7}"/>
               </a:ext>
             </a:extLst>
           </p:cNvPr>
@@ -2618,7 +2618,7 @@
           <p:cNvPr id="5" name="日付プレースホルダー 4">
             <a:extLst>
               <a:ext uri="{FF2B5EF4-FFF2-40B4-BE49-F238E27FC236}">
-                <a16:creationId xmlns:a16="http://schemas.microsoft.com/office/drawing/2014/main" id="{7B81BA57-B55F-C0B3-6F63-73CA52A34545}"/>
+                <a16:creationId xmlns:a16="http://schemas.microsoft.com/office/drawing/2014/main" id="{015E5E6D-DDD9-E0A9-5C2B-6AF21146717E}"/>
               </a:ext>
             </a:extLst>
           </p:cNvPr>
@@ -2634,7 +2634,7 @@
           <a:bodyPr/>
           <a:lstStyle/>
           <a:p>
-            <a:fld id="{8531775F-8D45-4415-BBEB-373FCD5E289F}" type="datetimeFigureOut">
+            <a:fld id="{AE9D6548-C5E3-492D-A702-05323CE26A99}" type="datetimeFigureOut">
               <a:rPr kumimoji="1" lang="ja-JP" altLang="en-US" smtClean="0"/>
               <a:t>2026/7/30</a:t>
             </a:fld>
@@ -2647,7 +2647,7 @@
           <p:cNvPr id="6" name="フッター プレースホルダー 5">
             <a:extLst>
               <a:ext uri="{FF2B5EF4-FFF2-40B4-BE49-F238E27FC236}">
-                <a16:creationId xmlns:a16="http://schemas.microsoft.com/office/drawing/2014/main" id="{4891C697-0F43-137B-8A4A-A82D7CBE2019}"/>
+                <a16:creationId xmlns:a16="http://schemas.microsoft.com/office/drawing/2014/main" id="{63135878-3735-8FF0-4F0E-D192099484C2}"/>
               </a:ext>
             </a:extLst>
           </p:cNvPr>
@@ -2672,7 +2672,7 @@
           <p:cNvPr id="7" name="スライド番号プレースホルダー 6">
             <a:extLst>
               <a:ext uri="{FF2B5EF4-FFF2-40B4-BE49-F238E27FC236}">
-                <a16:creationId xmlns:a16="http://schemas.microsoft.com/office/drawing/2014/main" id="{64265773-D0D7-2538-3DEA-820F3D7EBA1B}"/>
+                <a16:creationId xmlns:a16="http://schemas.microsoft.com/office/drawing/2014/main" id="{4AD4A15B-B346-41D3-B755-C6B0139A0FB0}"/>
               </a:ext>
             </a:extLst>
           </p:cNvPr>
@@ -2688,7 +2688,7 @@
           <a:bodyPr/>
           <a:lstStyle/>
           <a:p>
-            <a:fld id="{0980FD42-E451-4C36-9622-B0D11C98EDD7}" type="slidenum">
+            <a:fld id="{4108343C-E8EC-49DB-9DFF-47DF045E7F59}" type="slidenum">
               <a:rPr kumimoji="1" lang="ja-JP" altLang="en-US" smtClean="0"/>
               <a:t>‹#›</a:t>
             </a:fld>
@@ -2699,7 +2699,7 @@
     </p:spTree>
     <p:extLst>
       <p:ext uri="{BB962C8B-B14F-4D97-AF65-F5344CB8AC3E}">
-        <p14:creationId xmlns:p14="http://schemas.microsoft.com/office/powerpoint/2010/main" val="1233296045"/>
+        <p14:creationId xmlns:p14="http://schemas.microsoft.com/office/powerpoint/2010/main" val="2326437392"/>
       </p:ext>
     </p:extLst>
   </p:cSld>
@@ -2731,7 +2731,7 @@
           <p:cNvPr id="2" name="タイトル 1">
             <a:extLst>
               <a:ext uri="{FF2B5EF4-FFF2-40B4-BE49-F238E27FC236}">
-                <a16:creationId xmlns:a16="http://schemas.microsoft.com/office/drawing/2014/main" id="{CDF58A2B-5883-A87E-7EF4-F5CCB1DE086A}"/>
+                <a16:creationId xmlns:a16="http://schemas.microsoft.com/office/drawing/2014/main" id="{233742F6-A9E4-34A8-CB41-696EAB818BAB}"/>
               </a:ext>
             </a:extLst>
           </p:cNvPr>
@@ -2768,7 +2768,7 @@
           <p:cNvPr id="3" name="図プレースホルダー 2">
             <a:extLst>
               <a:ext uri="{FF2B5EF4-FFF2-40B4-BE49-F238E27FC236}">
-                <a16:creationId xmlns:a16="http://schemas.microsoft.com/office/drawing/2014/main" id="{D6038E63-450F-FE78-C247-9F1980D1BA08}"/>
+                <a16:creationId xmlns:a16="http://schemas.microsoft.com/office/drawing/2014/main" id="{BD311F95-DE0D-9ACF-B106-B0582960320D}"/>
               </a:ext>
             </a:extLst>
           </p:cNvPr>
@@ -2835,7 +2835,7 @@
           <p:cNvPr id="4" name="テキスト プレースホルダー 3">
             <a:extLst>
               <a:ext uri="{FF2B5EF4-FFF2-40B4-BE49-F238E27FC236}">
-                <a16:creationId xmlns:a16="http://schemas.microsoft.com/office/drawing/2014/main" id="{5B9EE03F-641D-312F-ADC4-52A5B65C5A13}"/>
+                <a16:creationId xmlns:a16="http://schemas.microsoft.com/office/drawing/2014/main" id="{39F60BBB-93CB-F456-5C91-F9E92BEA601A}"/>
               </a:ext>
             </a:extLst>
           </p:cNvPr>
@@ -2906,7 +2906,7 @@
           <p:cNvPr id="5" name="日付プレースホルダー 4">
             <a:extLst>
               <a:ext uri="{FF2B5EF4-FFF2-40B4-BE49-F238E27FC236}">
-                <a16:creationId xmlns:a16="http://schemas.microsoft.com/office/drawing/2014/main" id="{DEFAB7B6-544F-EE23-F245-D544B06B3AA3}"/>
+                <a16:creationId xmlns:a16="http://schemas.microsoft.com/office/drawing/2014/main" id="{AA336ADE-5826-3D98-6028-E01B836484DD}"/>
               </a:ext>
             </a:extLst>
           </p:cNvPr>
@@ -2922,7 +2922,7 @@
           <a:bodyPr/>
           <a:lstStyle/>
           <a:p>
-            <a:fld id="{8531775F-8D45-4415-BBEB-373FCD5E289F}" type="datetimeFigureOut">
+            <a:fld id="{AE9D6548-C5E3-492D-A702-05323CE26A99}" type="datetimeFigureOut">
               <a:rPr kumimoji="1" lang="ja-JP" altLang="en-US" smtClean="0"/>
               <a:t>2026/7/30</a:t>
             </a:fld>
@@ -2935,7 +2935,7 @@
           <p:cNvPr id="6" name="フッター プレースホルダー 5">
             <a:extLst>
               <a:ext uri="{FF2B5EF4-FFF2-40B4-BE49-F238E27FC236}">
-                <a16:creationId xmlns:a16="http://schemas.microsoft.com/office/drawing/2014/main" id="{E624FB1A-3EBE-9859-B01B-C1A869C72B30}"/>
+                <a16:creationId xmlns:a16="http://schemas.microsoft.com/office/drawing/2014/main" id="{7184B536-E529-9FF1-89CC-F52AEF0848CD}"/>
               </a:ext>
             </a:extLst>
           </p:cNvPr>
@@ -2960,7 +2960,7 @@
           <p:cNvPr id="7" name="スライド番号プレースホルダー 6">
             <a:extLst>
               <a:ext uri="{FF2B5EF4-FFF2-40B4-BE49-F238E27FC236}">
-                <a16:creationId xmlns:a16="http://schemas.microsoft.com/office/drawing/2014/main" id="{E96D0B50-4FD3-38C5-3691-AFE1F2E47151}"/>
+                <a16:creationId xmlns:a16="http://schemas.microsoft.com/office/drawing/2014/main" id="{8AF2FBC4-299A-FF36-C5EB-BB67D7F76FB0}"/>
               </a:ext>
             </a:extLst>
           </p:cNvPr>
@@ -2976,7 +2976,7 @@
           <a:bodyPr/>
           <a:lstStyle/>
           <a:p>
-            <a:fld id="{0980FD42-E451-4C36-9622-B0D11C98EDD7}" type="slidenum">
+            <a:fld id="{4108343C-E8EC-49DB-9DFF-47DF045E7F59}" type="slidenum">
               <a:rPr kumimoji="1" lang="ja-JP" altLang="en-US" smtClean="0"/>
               <a:t>‹#›</a:t>
             </a:fld>
@@ -2987,7 +2987,7 @@
     </p:spTree>
     <p:extLst>
       <p:ext uri="{BB962C8B-B14F-4D97-AF65-F5344CB8AC3E}">
-        <p14:creationId xmlns:p14="http://schemas.microsoft.com/office/powerpoint/2010/main" val="397965833"/>
+        <p14:creationId xmlns:p14="http://schemas.microsoft.com/office/powerpoint/2010/main" val="337713073"/>
       </p:ext>
     </p:extLst>
   </p:cSld>
@@ -3024,7 +3024,7 @@
           <p:cNvPr id="2" name="タイトル プレースホルダー 1">
             <a:extLst>
               <a:ext uri="{FF2B5EF4-FFF2-40B4-BE49-F238E27FC236}">
-                <a16:creationId xmlns:a16="http://schemas.microsoft.com/office/drawing/2014/main" id="{C0037DEB-92B6-AE29-D0B1-8639145603F0}"/>
+                <a16:creationId xmlns:a16="http://schemas.microsoft.com/office/drawing/2014/main" id="{975289FA-C57E-D772-4C73-25DC7E4A0B9E}"/>
               </a:ext>
             </a:extLst>
           </p:cNvPr>
@@ -3062,7 +3062,7 @@
           <p:cNvPr id="3" name="テキスト プレースホルダー 2">
             <a:extLst>
               <a:ext uri="{FF2B5EF4-FFF2-40B4-BE49-F238E27FC236}">
-                <a16:creationId xmlns:a16="http://schemas.microsoft.com/office/drawing/2014/main" id="{C2A3A99A-6259-6E43-DC2E-5F7CC759A92B}"/>
+                <a16:creationId xmlns:a16="http://schemas.microsoft.com/office/drawing/2014/main" id="{C0B0265B-F6AD-15D5-6D9F-35B22747A63B}"/>
               </a:ext>
             </a:extLst>
           </p:cNvPr>
@@ -3161,7 +3161,7 @@
           <p:cNvPr id="4" name="日付プレースホルダー 3">
             <a:extLst>
               <a:ext uri="{FF2B5EF4-FFF2-40B4-BE49-F238E27FC236}">
-                <a16:creationId xmlns:a16="http://schemas.microsoft.com/office/drawing/2014/main" id="{A750ED06-57DE-1BBA-065B-818C6DA29544}"/>
+                <a16:creationId xmlns:a16="http://schemas.microsoft.com/office/drawing/2014/main" id="{6EFAFB50-3B72-BC11-2CF4-34E1231C7268}"/>
               </a:ext>
             </a:extLst>
           </p:cNvPr>
@@ -3195,7 +3195,7 @@
             </a:lvl1pPr>
           </a:lstStyle>
           <a:p>
-            <a:fld id="{8531775F-8D45-4415-BBEB-373FCD5E289F}" type="datetimeFigureOut">
+            <a:fld id="{AE9D6548-C5E3-492D-A702-05323CE26A99}" type="datetimeFigureOut">
               <a:rPr kumimoji="1" lang="ja-JP" altLang="en-US" smtClean="0"/>
               <a:t>2026/7/30</a:t>
             </a:fld>
@@ -3208,7 +3208,7 @@
           <p:cNvPr id="5" name="フッター プレースホルダー 4">
             <a:extLst>
               <a:ext uri="{FF2B5EF4-FFF2-40B4-BE49-F238E27FC236}">
-                <a16:creationId xmlns:a16="http://schemas.microsoft.com/office/drawing/2014/main" id="{8D94AEA4-E794-DE58-D572-CF4617C55600}"/>
+                <a16:creationId xmlns:a16="http://schemas.microsoft.com/office/drawing/2014/main" id="{9E536039-F95A-3E11-C717-772F42C09A41}"/>
               </a:ext>
             </a:extLst>
           </p:cNvPr>
@@ -3251,7 +3251,7 @@
           <p:cNvPr id="6" name="スライド番号プレースホルダー 5">
             <a:extLst>
               <a:ext uri="{FF2B5EF4-FFF2-40B4-BE49-F238E27FC236}">
-                <a16:creationId xmlns:a16="http://schemas.microsoft.com/office/drawing/2014/main" id="{07BD58D6-BB21-D79D-6078-A8A4EFA0854C}"/>
+                <a16:creationId xmlns:a16="http://schemas.microsoft.com/office/drawing/2014/main" id="{AD420E33-8F2A-AB14-BBF8-92CD77D12AA5}"/>
               </a:ext>
             </a:extLst>
           </p:cNvPr>
@@ -3285,7 +3285,7 @@
             </a:lvl1pPr>
           </a:lstStyle>
           <a:p>
-            <a:fld id="{0980FD42-E451-4C36-9622-B0D11C98EDD7}" type="slidenum">
+            <a:fld id="{4108343C-E8EC-49DB-9DFF-47DF045E7F59}" type="slidenum">
               <a:rPr kumimoji="1" lang="ja-JP" altLang="en-US" smtClean="0"/>
               <a:t>‹#›</a:t>
             </a:fld>
@@ -3296,7 +3296,7 @@
     </p:spTree>
     <p:extLst>
       <p:ext uri="{BB962C8B-B14F-4D97-AF65-F5344CB8AC3E}">
-        <p14:creationId xmlns:p14="http://schemas.microsoft.com/office/powerpoint/2010/main" val="2495870651"/>
+        <p14:creationId xmlns:p14="http://schemas.microsoft.com/office/powerpoint/2010/main" val="600430835"/>
       </p:ext>
     </p:extLst>
   </p:cSld>
@@ -3619,7 +3619,7 @@
           <p:cNvPr id="2" name="テキスト ボックス 1">
             <a:extLst>
               <a:ext uri="{FF2B5EF4-FFF2-40B4-BE49-F238E27FC236}">
-                <a16:creationId xmlns:a16="http://schemas.microsoft.com/office/drawing/2014/main" id="{3A688441-2989-B61D-E327-E1B40ADDBDA2}"/>
+                <a16:creationId xmlns:a16="http://schemas.microsoft.com/office/drawing/2014/main" id="{7CCE149F-63D2-24D7-A229-AB23118C7649}"/>
               </a:ext>
             </a:extLst>
           </p:cNvPr>
@@ -3665,7 +3665,7 @@
           <p:cNvPr id="3" name="テキスト ボックス 2">
             <a:extLst>
               <a:ext uri="{FF2B5EF4-FFF2-40B4-BE49-F238E27FC236}">
-                <a16:creationId xmlns:a16="http://schemas.microsoft.com/office/drawing/2014/main" id="{449D257F-7569-BD18-C9C9-4DAB05258C5C}"/>
+                <a16:creationId xmlns:a16="http://schemas.microsoft.com/office/drawing/2014/main" id="{24F96EC5-0F64-D9B0-B0BB-699EAF6163B0}"/>
               </a:ext>
             </a:extLst>
           </p:cNvPr>
@@ -3695,14 +3695,17 @@
                 </a:solidFill>
                 <a:latin typeface="Arial" panose="020B0604020202020204" pitchFamily="34" charset="0"/>
               </a:rPr>
-              <a:t>leaflet-app1 TECH EXPLANATION</a:t>
-            </a:r>
-            <a:endParaRPr kumimoji="1" lang="ja-JP" altLang="en-US" sz="3400" b="1">
-              <a:solidFill>
-                <a:srgbClr val="111111"/>
-              </a:solidFill>
-              <a:latin typeface="Arial" panose="020B0604020202020204" pitchFamily="34" charset="0"/>
-            </a:endParaRPr>
+              <a:t>Leaflet App1</a:t>
+            </a:r>
+            <a:r>
+              <a:rPr kumimoji="1" lang="ja-JP" altLang="en-US" sz="3400" b="1">
+                <a:solidFill>
+                  <a:srgbClr val="111111"/>
+                </a:solidFill>
+                <a:latin typeface="Arial" panose="020B0604020202020204" pitchFamily="34" charset="0"/>
+              </a:rPr>
+              <a:t>の技術解説</a:t>
+            </a:r>
           </a:p>
         </p:txBody>
       </p:sp>
@@ -3711,7 +3714,7 @@
           <p:cNvPr id="4" name="テキスト ボックス 3">
             <a:extLst>
               <a:ext uri="{FF2B5EF4-FFF2-40B4-BE49-F238E27FC236}">
-                <a16:creationId xmlns:a16="http://schemas.microsoft.com/office/drawing/2014/main" id="{21747368-3EC4-F5ED-05B2-2D4E47ED9FAF}"/>
+                <a16:creationId xmlns:a16="http://schemas.microsoft.com/office/drawing/2014/main" id="{79DF5358-AE0D-A8F7-9A2C-7A023F2D59A5}"/>
               </a:ext>
             </a:extLst>
           </p:cNvPr>
@@ -3735,20 +3738,14 @@
           <a:lstStyle/>
           <a:p>
             <a:r>
-              <a:rPr kumimoji="1" lang="en-US" altLang="ja-JP" sz="2000">
+              <a:rPr kumimoji="1" lang="ja-JP" altLang="en-US" sz="2000">
                 <a:solidFill>
                   <a:srgbClr val="333333"/>
                 </a:solidFill>
                 <a:latin typeface="Arial" panose="020B0604020202020204" pitchFamily="34" charset="0"/>
               </a:rPr>
-              <a:t>Architecture, implementation and commit history in 75 seconds</a:t>
-            </a:r>
-            <a:endParaRPr kumimoji="1" lang="ja-JP" altLang="en-US" sz="2000">
-              <a:solidFill>
-                <a:srgbClr val="333333"/>
-              </a:solidFill>
-              <a:latin typeface="Arial" panose="020B0604020202020204" pitchFamily="34" charset="0"/>
-            </a:endParaRPr>
+              <a:t>設計・実装・コミットから学ぶ短時間プレビュー</a:t>
+            </a:r>
           </a:p>
         </p:txBody>
       </p:sp>
@@ -3757,7 +3754,7 @@
           <p:cNvPr id="5" name="テキスト ボックス 4">
             <a:extLst>
               <a:ext uri="{FF2B5EF4-FFF2-40B4-BE49-F238E27FC236}">
-                <a16:creationId xmlns:a16="http://schemas.microsoft.com/office/drawing/2014/main" id="{C6140B8C-BC9A-6186-22C9-DEC94E914990}"/>
+                <a16:creationId xmlns:a16="http://schemas.microsoft.com/office/drawing/2014/main" id="{20E504A2-7F48-1795-2667-749B1AA54221}"/>
               </a:ext>
             </a:extLst>
           </p:cNvPr>
@@ -3804,7 +3801,7 @@
             <a:hlinkClick r:id="" action="ppaction://media"/>
             <a:extLst>
               <a:ext uri="{FF2B5EF4-FFF2-40B4-BE49-F238E27FC236}">
-                <a16:creationId xmlns:a16="http://schemas.microsoft.com/office/drawing/2014/main" id="{2FFB64F8-954E-6707-49BB-76619BF93B56}"/>
+                <a16:creationId xmlns:a16="http://schemas.microsoft.com/office/drawing/2014/main" id="{D9C7AFFC-4374-0ED3-AC1C-60DECEAC2BA6}"/>
               </a:ext>
             </a:extLst>
           </p:cNvPr>
@@ -3839,7 +3836,7 @@
     </p:spTree>
     <p:extLst>
       <p:ext uri="{BB962C8B-B14F-4D97-AF65-F5344CB8AC3E}">
-        <p14:creationId xmlns:p14="http://schemas.microsoft.com/office/powerpoint/2010/main" val="2227880515"/>
+        <p14:creationId xmlns:p14="http://schemas.microsoft.com/office/powerpoint/2010/main" val="1448425594"/>
       </p:ext>
     </p:extLst>
   </p:cSld>
@@ -3963,7 +3960,7 @@
           <p:cNvPr id="2" name="テキスト ボックス 1">
             <a:extLst>
               <a:ext uri="{FF2B5EF4-FFF2-40B4-BE49-F238E27FC236}">
-                <a16:creationId xmlns:a16="http://schemas.microsoft.com/office/drawing/2014/main" id="{FA89BB82-D628-A8CB-7D7F-F492D8A4F41B}"/>
+                <a16:creationId xmlns:a16="http://schemas.microsoft.com/office/drawing/2014/main" id="{64579911-EDBB-5C57-B4B7-90E9861DBA8F}"/>
               </a:ext>
             </a:extLst>
           </p:cNvPr>
@@ -4009,7 +4006,7 @@
           <p:cNvPr id="3" name="テキスト ボックス 2">
             <a:extLst>
               <a:ext uri="{FF2B5EF4-FFF2-40B4-BE49-F238E27FC236}">
-                <a16:creationId xmlns:a16="http://schemas.microsoft.com/office/drawing/2014/main" id="{EC276172-F036-846F-3370-C74EA3010D4F}"/>
+                <a16:creationId xmlns:a16="http://schemas.microsoft.com/office/drawing/2014/main" id="{153977E4-46DE-6C0F-AC90-9B34A5E5E9C8}"/>
               </a:ext>
             </a:extLst>
           </p:cNvPr>
@@ -4033,20 +4030,14 @@
           <a:lstStyle/>
           <a:p>
             <a:r>
-              <a:rPr kumimoji="1" lang="en-US" altLang="ja-JP" sz="3400" b="1">
+              <a:rPr kumimoji="1" lang="ja-JP" altLang="en-US" sz="3400" b="1">
                 <a:solidFill>
                   <a:srgbClr val="111111"/>
                 </a:solidFill>
                 <a:latin typeface="Arial" panose="020B0604020202020204" pitchFamily="34" charset="0"/>
               </a:rPr>
-              <a:t>WHAT DOES IT SOLVE?</a:t>
-            </a:r>
-            <a:endParaRPr kumimoji="1" lang="ja-JP" altLang="en-US" sz="3400" b="1">
-              <a:solidFill>
-                <a:srgbClr val="111111"/>
-              </a:solidFill>
-              <a:latin typeface="Arial" panose="020B0604020202020204" pitchFamily="34" charset="0"/>
-            </a:endParaRPr>
+              <a:t>このプロジェクトは何を解決する？</a:t>
+            </a:r>
           </a:p>
         </p:txBody>
       </p:sp>
@@ -4055,7 +4046,7 @@
           <p:cNvPr id="4" name="テキスト ボックス 3">
             <a:extLst>
               <a:ext uri="{FF2B5EF4-FFF2-40B4-BE49-F238E27FC236}">
-                <a16:creationId xmlns:a16="http://schemas.microsoft.com/office/drawing/2014/main" id="{DD0EA338-F3FB-8FAE-98EE-2342AD939477}"/>
+                <a16:creationId xmlns:a16="http://schemas.microsoft.com/office/drawing/2014/main" id="{FA25C90F-3214-960E-EF68-606F58B1351A}"/>
               </a:ext>
             </a:extLst>
           </p:cNvPr>
@@ -4176,7 +4167,7 @@
           <p:cNvPr id="5" name="テキスト ボックス 4">
             <a:extLst>
               <a:ext uri="{FF2B5EF4-FFF2-40B4-BE49-F238E27FC236}">
-                <a16:creationId xmlns:a16="http://schemas.microsoft.com/office/drawing/2014/main" id="{564110A1-2FD0-0E6F-0782-7CF41818275C}"/>
+                <a16:creationId xmlns:a16="http://schemas.microsoft.com/office/drawing/2014/main" id="{053D2230-2922-55A2-7D53-8E49CE437BFA}"/>
               </a:ext>
             </a:extLst>
           </p:cNvPr>
@@ -4223,7 +4214,7 @@
             <a:hlinkClick r:id="" action="ppaction://media"/>
             <a:extLst>
               <a:ext uri="{FF2B5EF4-FFF2-40B4-BE49-F238E27FC236}">
-                <a16:creationId xmlns:a16="http://schemas.microsoft.com/office/drawing/2014/main" id="{AE600876-2C42-D80C-BF02-A9CB65D86A05}"/>
+                <a16:creationId xmlns:a16="http://schemas.microsoft.com/office/drawing/2014/main" id="{BC548336-BE74-B036-F8D1-5032C14CB560}"/>
               </a:ext>
             </a:extLst>
           </p:cNvPr>
@@ -4258,7 +4249,7 @@
     </p:spTree>
     <p:extLst>
       <p:ext uri="{BB962C8B-B14F-4D97-AF65-F5344CB8AC3E}">
-        <p14:creationId xmlns:p14="http://schemas.microsoft.com/office/powerpoint/2010/main" val="4168881674"/>
+        <p14:creationId xmlns:p14="http://schemas.microsoft.com/office/powerpoint/2010/main" val="3367288386"/>
       </p:ext>
     </p:extLst>
   </p:cSld>
@@ -4382,7 +4373,7 @@
           <p:cNvPr id="2" name="テキスト ボックス 1">
             <a:extLst>
               <a:ext uri="{FF2B5EF4-FFF2-40B4-BE49-F238E27FC236}">
-                <a16:creationId xmlns:a16="http://schemas.microsoft.com/office/drawing/2014/main" id="{A47756CF-5577-E699-DB7A-9227A08C6408}"/>
+                <a16:creationId xmlns:a16="http://schemas.microsoft.com/office/drawing/2014/main" id="{44035005-8D4D-CE88-83E3-009EC2CE0427}"/>
               </a:ext>
             </a:extLst>
           </p:cNvPr>
@@ -4428,7 +4419,7 @@
           <p:cNvPr id="3" name="テキスト ボックス 2">
             <a:extLst>
               <a:ext uri="{FF2B5EF4-FFF2-40B4-BE49-F238E27FC236}">
-                <a16:creationId xmlns:a16="http://schemas.microsoft.com/office/drawing/2014/main" id="{48977F47-5BEF-B32A-6E5B-CFE32EC90240}"/>
+                <a16:creationId xmlns:a16="http://schemas.microsoft.com/office/drawing/2014/main" id="{15B8C614-0067-0B81-8B99-AE443DA128B5}"/>
               </a:ext>
             </a:extLst>
           </p:cNvPr>
@@ -4452,20 +4443,14 @@
           <a:lstStyle/>
           <a:p>
             <a:r>
-              <a:rPr kumimoji="1" lang="en-US" altLang="ja-JP" sz="3400" b="1">
+              <a:rPr kumimoji="1" lang="ja-JP" altLang="en-US" sz="3400" b="1">
                 <a:solidFill>
                   <a:srgbClr val="111111"/>
                 </a:solidFill>
                 <a:latin typeface="Arial" panose="020B0604020202020204" pitchFamily="34" charset="0"/>
               </a:rPr>
-              <a:t>TECH STACK</a:t>
-            </a:r>
-            <a:endParaRPr kumimoji="1" lang="ja-JP" altLang="en-US" sz="3400" b="1">
-              <a:solidFill>
-                <a:srgbClr val="111111"/>
-              </a:solidFill>
-              <a:latin typeface="Arial" panose="020B0604020202020204" pitchFamily="34" charset="0"/>
-            </a:endParaRPr>
+              <a:t>技術スタック</a:t>
+            </a:r>
           </a:p>
         </p:txBody>
       </p:sp>
@@ -4474,7 +4459,7 @@
           <p:cNvPr id="4" name="テキスト ボックス 3">
             <a:extLst>
               <a:ext uri="{FF2B5EF4-FFF2-40B4-BE49-F238E27FC236}">
-                <a16:creationId xmlns:a16="http://schemas.microsoft.com/office/drawing/2014/main" id="{2A40607B-2C6B-0D03-3B73-64A44AC96EB1}"/>
+                <a16:creationId xmlns:a16="http://schemas.microsoft.com/office/drawing/2014/main" id="{8228FB80-F99A-1956-CC38-1E3974CBEE20}"/>
               </a:ext>
             </a:extLst>
           </p:cNvPr>
@@ -4484,7 +4469,7 @@
         <p:spPr>
           <a:xfrm>
             <a:off x="533400" y="3429000"/>
-            <a:ext cx="10795000" cy="400110"/>
+            <a:ext cx="10795000" cy="707886"/>
           </a:xfrm>
           <a:prstGeom prst="rect">
             <a:avLst/>
@@ -4498,20 +4483,33 @@
           <a:lstStyle/>
           <a:p>
             <a:r>
+              <a:rPr kumimoji="1" lang="ja-JP" altLang="en-US" sz="2000">
+                <a:solidFill>
+                  <a:srgbClr val="333333"/>
+                </a:solidFill>
+                <a:latin typeface="Arial" panose="020B0604020202020204" pitchFamily="34" charset="0"/>
+              </a:rPr>
+              <a:t>主要技術：</a:t>
+            </a:r>
+            <a:r>
               <a:rPr kumimoji="1" lang="en-US" altLang="ja-JP" sz="2000">
                 <a:solidFill>
                   <a:srgbClr val="333333"/>
                 </a:solidFill>
                 <a:latin typeface="Arial" panose="020B0604020202020204" pitchFamily="34" charset="0"/>
               </a:rPr>
-              <a:t>Primary technologies: TypeScript</a:t>
-            </a:r>
-            <a:endParaRPr kumimoji="1" lang="ja-JP" altLang="en-US" sz="2000">
-              <a:solidFill>
-                <a:srgbClr val="333333"/>
-              </a:solidFill>
-              <a:latin typeface="Arial" panose="020B0604020202020204" pitchFamily="34" charset="0"/>
-            </a:endParaRPr>
+              <a:t>TypeScript
+</a:t>
+            </a:r>
+            <a:r>
+              <a:rPr kumimoji="1" lang="ja-JP" altLang="en-US" sz="2000">
+                <a:solidFill>
+                  <a:srgbClr val="333333"/>
+                </a:solidFill>
+                <a:latin typeface="Arial" panose="020B0604020202020204" pitchFamily="34" charset="0"/>
+              </a:rPr>
+              <a:t>役割を分け、保守しやすい構成を目指しています。</a:t>
+            </a:r>
           </a:p>
         </p:txBody>
       </p:sp>
@@ -4520,7 +4518,7 @@
           <p:cNvPr id="5" name="テキスト ボックス 4">
             <a:extLst>
               <a:ext uri="{FF2B5EF4-FFF2-40B4-BE49-F238E27FC236}">
-                <a16:creationId xmlns:a16="http://schemas.microsoft.com/office/drawing/2014/main" id="{57D39AF6-2D57-6E3C-91AA-BB75ACACBEFF}"/>
+                <a16:creationId xmlns:a16="http://schemas.microsoft.com/office/drawing/2014/main" id="{A4899607-7C10-EBAD-E8E9-3AD564B59181}"/>
               </a:ext>
             </a:extLst>
           </p:cNvPr>
@@ -4567,7 +4565,7 @@
             <a:hlinkClick r:id="" action="ppaction://media"/>
             <a:extLst>
               <a:ext uri="{FF2B5EF4-FFF2-40B4-BE49-F238E27FC236}">
-                <a16:creationId xmlns:a16="http://schemas.microsoft.com/office/drawing/2014/main" id="{75D9EEB9-1CAC-8C24-62AD-92FD385AD8CD}"/>
+                <a16:creationId xmlns:a16="http://schemas.microsoft.com/office/drawing/2014/main" id="{00FD711A-7922-180C-F1C3-3172E8DA9BF1}"/>
               </a:ext>
             </a:extLst>
           </p:cNvPr>
@@ -4602,7 +4600,7 @@
     </p:spTree>
     <p:extLst>
       <p:ext uri="{BB962C8B-B14F-4D97-AF65-F5344CB8AC3E}">
-        <p14:creationId xmlns:p14="http://schemas.microsoft.com/office/powerpoint/2010/main" val="1281108738"/>
+        <p14:creationId xmlns:p14="http://schemas.microsoft.com/office/powerpoint/2010/main" val="3651618670"/>
       </p:ext>
     </p:extLst>
   </p:cSld>
@@ -4726,7 +4724,7 @@
           <p:cNvPr id="2" name="テキスト ボックス 1">
             <a:extLst>
               <a:ext uri="{FF2B5EF4-FFF2-40B4-BE49-F238E27FC236}">
-                <a16:creationId xmlns:a16="http://schemas.microsoft.com/office/drawing/2014/main" id="{453F7B6C-AD0A-1326-31DA-D2FFCE3FCAF6}"/>
+                <a16:creationId xmlns:a16="http://schemas.microsoft.com/office/drawing/2014/main" id="{B696B9BD-481C-24EA-445E-61018E6F901E}"/>
               </a:ext>
             </a:extLst>
           </p:cNvPr>
@@ -4772,7 +4770,7 @@
           <p:cNvPr id="3" name="テキスト ボックス 2">
             <a:extLst>
               <a:ext uri="{FF2B5EF4-FFF2-40B4-BE49-F238E27FC236}">
-                <a16:creationId xmlns:a16="http://schemas.microsoft.com/office/drawing/2014/main" id="{1A26500B-026C-7FD0-244B-0FA7AE7B6E95}"/>
+                <a16:creationId xmlns:a16="http://schemas.microsoft.com/office/drawing/2014/main" id="{E362DE4C-D50D-FC37-CE58-5672F48C0EF4}"/>
               </a:ext>
             </a:extLst>
           </p:cNvPr>
@@ -4796,20 +4794,14 @@
           <a:lstStyle/>
           <a:p>
             <a:r>
-              <a:rPr kumimoji="1" lang="en-US" altLang="ja-JP" sz="3400" b="1">
+              <a:rPr kumimoji="1" lang="ja-JP" altLang="en-US" sz="3400" b="1">
                 <a:solidFill>
                   <a:srgbClr val="111111"/>
                 </a:solidFill>
                 <a:latin typeface="Arial" panose="020B0604020202020204" pitchFamily="34" charset="0"/>
               </a:rPr>
-              <a:t>REPOSITORY HIGHLIGHTS</a:t>
-            </a:r>
-            <a:endParaRPr kumimoji="1" lang="ja-JP" altLang="en-US" sz="3400" b="1">
-              <a:solidFill>
-                <a:srgbClr val="111111"/>
-              </a:solidFill>
-              <a:latin typeface="Arial" panose="020B0604020202020204" pitchFamily="34" charset="0"/>
-            </a:endParaRPr>
+              <a:t>リポジトリの読みどころ</a:t>
+            </a:r>
           </a:p>
         </p:txBody>
       </p:sp>
@@ -4818,7 +4810,7 @@
           <p:cNvPr id="4" name="テキスト ボックス 3">
             <a:extLst>
               <a:ext uri="{FF2B5EF4-FFF2-40B4-BE49-F238E27FC236}">
-                <a16:creationId xmlns:a16="http://schemas.microsoft.com/office/drawing/2014/main" id="{7F051F9E-D04C-A8AD-D587-8157A49AFD16}"/>
+                <a16:creationId xmlns:a16="http://schemas.microsoft.com/office/drawing/2014/main" id="{8E31904A-FD28-5563-1A09-914C957E7159}"/>
               </a:ext>
             </a:extLst>
           </p:cNvPr>
@@ -4828,7 +4820,7 @@
         <p:spPr>
           <a:xfrm>
             <a:off x="533400" y="3429000"/>
-            <a:ext cx="10795000" cy="400110"/>
+            <a:ext cx="10795000" cy="707886"/>
           </a:xfrm>
           <a:prstGeom prst="rect">
             <a:avLst/>
@@ -4842,13 +4834,77 @@
           <a:lstStyle/>
           <a:p>
             <a:r>
+              <a:rPr kumimoji="1" lang="ja-JP" altLang="en-US" sz="2000">
+                <a:solidFill>
+                  <a:srgbClr val="333333"/>
+                </a:solidFill>
+                <a:latin typeface="Arial" panose="020B0604020202020204" pitchFamily="34" charset="0"/>
+              </a:rPr>
+              <a:t>公開コード、</a:t>
+            </a:r>
+            <a:r>
               <a:rPr kumimoji="1" lang="en-US" altLang="ja-JP" sz="2000">
                 <a:solidFill>
                   <a:srgbClr val="333333"/>
                 </a:solidFill>
                 <a:latin typeface="Arial" panose="020B0604020202020204" pitchFamily="34" charset="0"/>
               </a:rPr>
-              <a:t>Public source code, README and commit history reveal the design decisions.</a:t>
+              <a:t>README</a:t>
+            </a:r>
+            <a:r>
+              <a:rPr kumimoji="1" lang="ja-JP" altLang="en-US" sz="2000">
+                <a:solidFill>
+                  <a:srgbClr val="333333"/>
+                </a:solidFill>
+                <a:latin typeface="Arial" panose="020B0604020202020204" pitchFamily="34" charset="0"/>
+              </a:rPr>
+              <a:t>、コミット履歴から設計判断を確認できます。
+主なファイル：</a:t>
+            </a:r>
+            <a:r>
+              <a:rPr kumimoji="1" lang="en-US" altLang="ja-JP" sz="2000">
+                <a:solidFill>
+                  <a:srgbClr val="333333"/>
+                </a:solidFill>
+                <a:latin typeface="Arial" panose="020B0604020202020204" pitchFamily="34" charset="0"/>
+              </a:rPr>
+              <a:t>README.md</a:t>
+            </a:r>
+            <a:r>
+              <a:rPr kumimoji="1" lang="ja-JP" altLang="en-US" sz="2000">
+                <a:solidFill>
+                  <a:srgbClr val="333333"/>
+                </a:solidFill>
+                <a:latin typeface="Arial" panose="020B0604020202020204" pitchFamily="34" charset="0"/>
+              </a:rPr>
+              <a:t>、</a:t>
+            </a:r>
+            <a:r>
+              <a:rPr kumimoji="1" lang="en-US" altLang="ja-JP" sz="2000">
+                <a:solidFill>
+                  <a:srgbClr val="333333"/>
+                </a:solidFill>
+                <a:latin typeface="Arial" panose="020B0604020202020204" pitchFamily="34" charset="0"/>
+              </a:rPr>
+              <a:t>app.json</a:t>
+            </a:r>
+            <a:r>
+              <a:rPr kumimoji="1" lang="ja-JP" altLang="en-US" sz="2000">
+                <a:solidFill>
+                  <a:srgbClr val="333333"/>
+                </a:solidFill>
+                <a:latin typeface="Arial" panose="020B0604020202020204" pitchFamily="34" charset="0"/>
+              </a:rPr>
+              <a:t>、</a:t>
+            </a:r>
+            <a:r>
+              <a:rPr kumimoji="1" lang="en-US" altLang="ja-JP" sz="2000">
+                <a:solidFill>
+                  <a:srgbClr val="333333"/>
+                </a:solidFill>
+                <a:latin typeface="Arial" panose="020B0604020202020204" pitchFamily="34" charset="0"/>
+              </a:rPr>
+              <a:t>app</a:t>
             </a:r>
             <a:endParaRPr kumimoji="1" lang="ja-JP" altLang="en-US" sz="2000">
               <a:solidFill>
@@ -4864,7 +4920,7 @@
           <p:cNvPr id="5" name="テキスト ボックス 4">
             <a:extLst>
               <a:ext uri="{FF2B5EF4-FFF2-40B4-BE49-F238E27FC236}">
-                <a16:creationId xmlns:a16="http://schemas.microsoft.com/office/drawing/2014/main" id="{86140FE1-1EC9-2714-17B2-36A7CD743CF9}"/>
+                <a16:creationId xmlns:a16="http://schemas.microsoft.com/office/drawing/2014/main" id="{D470B63D-2137-14AB-C212-F6C83A173192}"/>
               </a:ext>
             </a:extLst>
           </p:cNvPr>
@@ -4911,7 +4967,7 @@
             <a:hlinkClick r:id="" action="ppaction://media"/>
             <a:extLst>
               <a:ext uri="{FF2B5EF4-FFF2-40B4-BE49-F238E27FC236}">
-                <a16:creationId xmlns:a16="http://schemas.microsoft.com/office/drawing/2014/main" id="{287FCB78-326E-F391-8AFE-032240DA841B}"/>
+                <a16:creationId xmlns:a16="http://schemas.microsoft.com/office/drawing/2014/main" id="{7BF13154-BDED-9887-85CE-5198A377E184}"/>
               </a:ext>
             </a:extLst>
           </p:cNvPr>
@@ -4946,7 +5002,7 @@
     </p:spTree>
     <p:extLst>
       <p:ext uri="{BB962C8B-B14F-4D97-AF65-F5344CB8AC3E}">
-        <p14:creationId xmlns:p14="http://schemas.microsoft.com/office/powerpoint/2010/main" val="2240671781"/>
+        <p14:creationId xmlns:p14="http://schemas.microsoft.com/office/powerpoint/2010/main" val="2630122590"/>
       </p:ext>
     </p:extLst>
   </p:cSld>
@@ -5070,7 +5126,7 @@
           <p:cNvPr id="2" name="テキスト ボックス 1">
             <a:extLst>
               <a:ext uri="{FF2B5EF4-FFF2-40B4-BE49-F238E27FC236}">
-                <a16:creationId xmlns:a16="http://schemas.microsoft.com/office/drawing/2014/main" id="{F0C35066-50D0-1E40-F786-335A325BB4E1}"/>
+                <a16:creationId xmlns:a16="http://schemas.microsoft.com/office/drawing/2014/main" id="{7C746FEA-6A67-004F-E1CB-D593CF058B8B}"/>
               </a:ext>
             </a:extLst>
           </p:cNvPr>
@@ -5116,7 +5172,7 @@
           <p:cNvPr id="3" name="テキスト ボックス 2">
             <a:extLst>
               <a:ext uri="{FF2B5EF4-FFF2-40B4-BE49-F238E27FC236}">
-                <a16:creationId xmlns:a16="http://schemas.microsoft.com/office/drawing/2014/main" id="{330D04C9-2F6F-91C3-D9D7-DCB5AEF44D8C}"/>
+                <a16:creationId xmlns:a16="http://schemas.microsoft.com/office/drawing/2014/main" id="{6CB24DD2-3CA5-60D3-0632-35390AFAB1FC}"/>
               </a:ext>
             </a:extLst>
           </p:cNvPr>
@@ -5140,20 +5196,14 @@
           <a:lstStyle/>
           <a:p>
             <a:r>
-              <a:rPr kumimoji="1" lang="en-US" altLang="ja-JP" sz="3400" b="1">
+              <a:rPr kumimoji="1" lang="ja-JP" altLang="en-US" sz="3400" b="1">
                 <a:solidFill>
                   <a:srgbClr val="111111"/>
                 </a:solidFill>
                 <a:latin typeface="Arial" panose="020B0604020202020204" pitchFamily="34" charset="0"/>
               </a:rPr>
-              <a:t>ITERATIVE IMPROVEMENT</a:t>
-            </a:r>
-            <a:endParaRPr kumimoji="1" lang="ja-JP" altLang="en-US" sz="3400" b="1">
-              <a:solidFill>
-                <a:srgbClr val="111111"/>
-              </a:solidFill>
-              <a:latin typeface="Arial" panose="020B0604020202020204" pitchFamily="34" charset="0"/>
-            </a:endParaRPr>
+              <a:t>コミットから分かる改善</a:t>
+            </a:r>
           </a:p>
         </p:txBody>
       </p:sp>
@@ -5162,7 +5212,7 @@
           <p:cNvPr id="4" name="テキスト ボックス 3">
             <a:extLst>
               <a:ext uri="{FF2B5EF4-FFF2-40B4-BE49-F238E27FC236}">
-                <a16:creationId xmlns:a16="http://schemas.microsoft.com/office/drawing/2014/main" id="{227CB98E-8B9C-82BE-1E9F-0C5898083F85}"/>
+                <a16:creationId xmlns:a16="http://schemas.microsoft.com/office/drawing/2014/main" id="{8A18F309-2E68-D8A9-2145-FBE3FA7D5E2B}"/>
               </a:ext>
             </a:extLst>
           </p:cNvPr>
@@ -5192,7 +5242,7 @@
                 </a:solidFill>
                 <a:latin typeface="Arial" panose="020B0604020202020204" pitchFamily="34" charset="0"/>
               </a:rPr>
-              <a:t>Small commits continuously improve features, quality and release readiness.</a:t>
+              <a:t>Rebrand mobile app as SPOTPALETTE</a:t>
             </a:r>
             <a:endParaRPr kumimoji="1" lang="ja-JP" altLang="en-US" sz="2000">
               <a:solidFill>
@@ -5208,7 +5258,7 @@
           <p:cNvPr id="5" name="テキスト ボックス 4">
             <a:extLst>
               <a:ext uri="{FF2B5EF4-FFF2-40B4-BE49-F238E27FC236}">
-                <a16:creationId xmlns:a16="http://schemas.microsoft.com/office/drawing/2014/main" id="{99C857BA-F891-36D6-6D12-8DA7AF98BEEA}"/>
+                <a16:creationId xmlns:a16="http://schemas.microsoft.com/office/drawing/2014/main" id="{F904017E-46D1-F734-F704-14D4FF744F78}"/>
               </a:ext>
             </a:extLst>
           </p:cNvPr>
@@ -5255,7 +5305,7 @@
             <a:hlinkClick r:id="" action="ppaction://media"/>
             <a:extLst>
               <a:ext uri="{FF2B5EF4-FFF2-40B4-BE49-F238E27FC236}">
-                <a16:creationId xmlns:a16="http://schemas.microsoft.com/office/drawing/2014/main" id="{F5189812-DCFF-E5B4-1B93-0C003CABD75C}"/>
+                <a16:creationId xmlns:a16="http://schemas.microsoft.com/office/drawing/2014/main" id="{15CFF888-97AC-A0F8-DFD7-E0BB58E01245}"/>
               </a:ext>
             </a:extLst>
           </p:cNvPr>
@@ -5290,7 +5340,7 @@
     </p:spTree>
     <p:extLst>
       <p:ext uri="{BB962C8B-B14F-4D97-AF65-F5344CB8AC3E}">
-        <p14:creationId xmlns:p14="http://schemas.microsoft.com/office/powerpoint/2010/main" val="1120771712"/>
+        <p14:creationId xmlns:p14="http://schemas.microsoft.com/office/powerpoint/2010/main" val="1304850829"/>
       </p:ext>
     </p:extLst>
   </p:cSld>
@@ -5414,7 +5464,7 @@
           <p:cNvPr id="2" name="テキスト ボックス 1">
             <a:extLst>
               <a:ext uri="{FF2B5EF4-FFF2-40B4-BE49-F238E27FC236}">
-                <a16:creationId xmlns:a16="http://schemas.microsoft.com/office/drawing/2014/main" id="{FD91D3F8-102E-4915-7CB3-4129B8055048}"/>
+                <a16:creationId xmlns:a16="http://schemas.microsoft.com/office/drawing/2014/main" id="{5E6B00C1-B8C7-20F3-2854-69C962807AFF}"/>
               </a:ext>
             </a:extLst>
           </p:cNvPr>
@@ -5460,7 +5510,7 @@
           <p:cNvPr id="3" name="テキスト ボックス 2">
             <a:extLst>
               <a:ext uri="{FF2B5EF4-FFF2-40B4-BE49-F238E27FC236}">
-                <a16:creationId xmlns:a16="http://schemas.microsoft.com/office/drawing/2014/main" id="{D6D5AFC5-202A-90E8-E031-175368BEA4AD}"/>
+                <a16:creationId xmlns:a16="http://schemas.microsoft.com/office/drawing/2014/main" id="{EECD8C6A-F8A8-1AAE-8A27-BD2CB44F0D13}"/>
               </a:ext>
             </a:extLst>
           </p:cNvPr>
@@ -5484,20 +5534,14 @@
           <a:lstStyle/>
           <a:p>
             <a:r>
-              <a:rPr kumimoji="1" lang="en-US" altLang="ja-JP" sz="3400" b="1">
+              <a:rPr kumimoji="1" lang="ja-JP" altLang="en-US" sz="3400" b="1">
                 <a:solidFill>
                   <a:srgbClr val="111111"/>
                 </a:solidFill>
                 <a:latin typeface="Arial" panose="020B0604020202020204" pitchFamily="34" charset="0"/>
               </a:rPr>
-              <a:t>READ THE FULL ARTICLE</a:t>
-            </a:r>
-            <a:endParaRPr kumimoji="1" lang="ja-JP" altLang="en-US" sz="3400" b="1">
-              <a:solidFill>
-                <a:srgbClr val="111111"/>
-              </a:solidFill>
-              <a:latin typeface="Arial" panose="020B0604020202020204" pitchFamily="34" charset="0"/>
-            </a:endParaRPr>
+              <a:t>詳しくは積み上げログへ</a:t>
+            </a:r>
           </a:p>
         </p:txBody>
       </p:sp>
@@ -5506,7 +5550,7 @@
           <p:cNvPr id="4" name="テキスト ボックス 3">
             <a:extLst>
               <a:ext uri="{FF2B5EF4-FFF2-40B4-BE49-F238E27FC236}">
-                <a16:creationId xmlns:a16="http://schemas.microsoft.com/office/drawing/2014/main" id="{C661F043-4902-C836-9FC4-3A477A6392B9}"/>
+                <a16:creationId xmlns:a16="http://schemas.microsoft.com/office/drawing/2014/main" id="{8B41A347-761D-B636-A63A-484E4ED897FD}"/>
               </a:ext>
             </a:extLst>
           </p:cNvPr>
@@ -5530,14 +5574,32 @@
           <a:lstStyle/>
           <a:p>
             <a:r>
-              <a:rPr kumimoji="1" lang="sv-SE" altLang="ja-JP" sz="2000">
+              <a:rPr kumimoji="1" lang="zh-TW" altLang="en-US" sz="2000">
+                <a:solidFill>
+                  <a:srgbClr val="333333"/>
+                </a:solidFill>
+                <a:latin typeface="Arial" panose="020B0604020202020204" pitchFamily="34" charset="0"/>
+              </a:rPr>
+              <a:t>記事： </a:t>
+            </a:r>
+            <a:r>
+              <a:rPr kumimoji="1" lang="en-US" altLang="zh-TW" sz="2000">
                 <a:solidFill>
                   <a:srgbClr val="333333"/>
                 </a:solidFill>
                 <a:latin typeface="Arial" panose="020B0604020202020204" pitchFamily="34" charset="0"/>
               </a:rPr>
               <a:t>https://syunnjack.dev/articles/leaflet-app1
-TSUMIAGE LOG</a:t>
+</a:t>
+            </a:r>
+            <a:r>
+              <a:rPr kumimoji="1" lang="zh-TW" altLang="en-US" sz="2000">
+                <a:solidFill>
+                  <a:srgbClr val="333333"/>
+                </a:solidFill>
+                <a:latin typeface="Arial" panose="020B0604020202020204" pitchFamily="34" charset="0"/>
+              </a:rPr>
+              <a:t>学び、作り、振り返る開発記録。</a:t>
             </a:r>
             <a:endParaRPr kumimoji="1" lang="ja-JP" altLang="en-US" sz="2000">
               <a:solidFill>
@@ -5553,7 +5615,7 @@
           <p:cNvPr id="5" name="テキスト ボックス 4">
             <a:extLst>
               <a:ext uri="{FF2B5EF4-FFF2-40B4-BE49-F238E27FC236}">
-                <a16:creationId xmlns:a16="http://schemas.microsoft.com/office/drawing/2014/main" id="{4A4AA669-EDC3-C83E-D466-2B4CB164155C}"/>
+                <a16:creationId xmlns:a16="http://schemas.microsoft.com/office/drawing/2014/main" id="{29A21E16-5F68-D7A5-BADB-4F1C8DFEBAD2}"/>
               </a:ext>
             </a:extLst>
           </p:cNvPr>
@@ -5600,7 +5662,7 @@
             <a:hlinkClick r:id="" action="ppaction://media"/>
             <a:extLst>
               <a:ext uri="{FF2B5EF4-FFF2-40B4-BE49-F238E27FC236}">
-                <a16:creationId xmlns:a16="http://schemas.microsoft.com/office/drawing/2014/main" id="{8ABE6978-95F0-94C3-185B-A66BCD78EB58}"/>
+                <a16:creationId xmlns:a16="http://schemas.microsoft.com/office/drawing/2014/main" id="{3A565348-51FA-53EA-E01C-87DD8A808308}"/>
               </a:ext>
             </a:extLst>
           </p:cNvPr>
@@ -5635,7 +5697,7 @@
     </p:spTree>
     <p:extLst>
       <p:ext uri="{BB962C8B-B14F-4D97-AF65-F5344CB8AC3E}">
-        <p14:creationId xmlns:p14="http://schemas.microsoft.com/office/powerpoint/2010/main" val="1966905411"/>
+        <p14:creationId xmlns:p14="http://schemas.microsoft.com/office/powerpoint/2010/main" val="3111838317"/>
       </p:ext>
     </p:extLst>
   </p:cSld>

--- a/public/videos/repositories/leaflet-app1/leaflet-app1-tech-preview.pptx
+++ b/public/videos/repositories/leaflet-app1/leaflet-app1-tech-preview.pptx
@@ -134,7 +134,7 @@
           <p:cNvPr id="2" name="タイトル 1">
             <a:extLst>
               <a:ext uri="{FF2B5EF4-FFF2-40B4-BE49-F238E27FC236}">
-                <a16:creationId xmlns:a16="http://schemas.microsoft.com/office/drawing/2014/main" id="{4953EB64-505C-F14A-3211-18C3F13A7570}"/>
+                <a16:creationId xmlns:a16="http://schemas.microsoft.com/office/drawing/2014/main" id="{38144FA2-166E-80B6-F5D9-4474192C2AC0}"/>
               </a:ext>
             </a:extLst>
           </p:cNvPr>
@@ -171,7 +171,7 @@
           <p:cNvPr id="3" name="字幕 2">
             <a:extLst>
               <a:ext uri="{FF2B5EF4-FFF2-40B4-BE49-F238E27FC236}">
-                <a16:creationId xmlns:a16="http://schemas.microsoft.com/office/drawing/2014/main" id="{D4983707-52A3-8A4E-ACFC-651945CEA7EA}"/>
+                <a16:creationId xmlns:a16="http://schemas.microsoft.com/office/drawing/2014/main" id="{7B920687-E719-3EC7-81BF-2006E9F8819B}"/>
               </a:ext>
             </a:extLst>
           </p:cNvPr>
@@ -241,7 +241,7 @@
           <p:cNvPr id="4" name="日付プレースホルダー 3">
             <a:extLst>
               <a:ext uri="{FF2B5EF4-FFF2-40B4-BE49-F238E27FC236}">
-                <a16:creationId xmlns:a16="http://schemas.microsoft.com/office/drawing/2014/main" id="{E27A0FAF-3745-FC33-9695-B0FF807D5AAE}"/>
+                <a16:creationId xmlns:a16="http://schemas.microsoft.com/office/drawing/2014/main" id="{ABB17AB7-6846-DEB1-550B-CB4EA8B43F21}"/>
               </a:ext>
             </a:extLst>
           </p:cNvPr>
@@ -257,7 +257,7 @@
           <a:bodyPr/>
           <a:lstStyle/>
           <a:p>
-            <a:fld id="{AE9D6548-C5E3-492D-A702-05323CE26A99}" type="datetimeFigureOut">
+            <a:fld id="{756D82B8-411E-469B-BBE6-EBAC5228C797}" type="datetimeFigureOut">
               <a:rPr kumimoji="1" lang="ja-JP" altLang="en-US" smtClean="0"/>
               <a:t>2026/7/30</a:t>
             </a:fld>
@@ -270,7 +270,7 @@
           <p:cNvPr id="5" name="フッター プレースホルダー 4">
             <a:extLst>
               <a:ext uri="{FF2B5EF4-FFF2-40B4-BE49-F238E27FC236}">
-                <a16:creationId xmlns:a16="http://schemas.microsoft.com/office/drawing/2014/main" id="{415D0FD6-ECE9-CA81-2877-6A540B324C56}"/>
+                <a16:creationId xmlns:a16="http://schemas.microsoft.com/office/drawing/2014/main" id="{65B1B3AF-62BF-571B-6C12-ECBBD51C0EDE}"/>
               </a:ext>
             </a:extLst>
           </p:cNvPr>
@@ -295,7 +295,7 @@
           <p:cNvPr id="6" name="スライド番号プレースホルダー 5">
             <a:extLst>
               <a:ext uri="{FF2B5EF4-FFF2-40B4-BE49-F238E27FC236}">
-                <a16:creationId xmlns:a16="http://schemas.microsoft.com/office/drawing/2014/main" id="{F40926B6-CE84-62C2-6523-F02A82F1D93E}"/>
+                <a16:creationId xmlns:a16="http://schemas.microsoft.com/office/drawing/2014/main" id="{6C2BA304-EA00-BC7A-7E6E-A70CE6DE8280}"/>
               </a:ext>
             </a:extLst>
           </p:cNvPr>
@@ -311,7 +311,7 @@
           <a:bodyPr/>
           <a:lstStyle/>
           <a:p>
-            <a:fld id="{4108343C-E8EC-49DB-9DFF-47DF045E7F59}" type="slidenum">
+            <a:fld id="{CD25CDC0-E257-4732-8712-ED5468484ED4}" type="slidenum">
               <a:rPr kumimoji="1" lang="ja-JP" altLang="en-US" smtClean="0"/>
               <a:t>‹#›</a:t>
             </a:fld>
@@ -322,7 +322,7 @@
     </p:spTree>
     <p:extLst>
       <p:ext uri="{BB962C8B-B14F-4D97-AF65-F5344CB8AC3E}">
-        <p14:creationId xmlns:p14="http://schemas.microsoft.com/office/powerpoint/2010/main" val="1000108443"/>
+        <p14:creationId xmlns:p14="http://schemas.microsoft.com/office/powerpoint/2010/main" val="366388204"/>
       </p:ext>
     </p:extLst>
   </p:cSld>
@@ -354,7 +354,7 @@
           <p:cNvPr id="2" name="タイトル 1">
             <a:extLst>
               <a:ext uri="{FF2B5EF4-FFF2-40B4-BE49-F238E27FC236}">
-                <a16:creationId xmlns:a16="http://schemas.microsoft.com/office/drawing/2014/main" id="{3ACF83BB-0B10-EE00-E343-3D72C9624AF2}"/>
+                <a16:creationId xmlns:a16="http://schemas.microsoft.com/office/drawing/2014/main" id="{04393AFD-37E1-8852-B3DC-2682F1108081}"/>
               </a:ext>
             </a:extLst>
           </p:cNvPr>
@@ -382,7 +382,7 @@
           <p:cNvPr id="3" name="縦書きテキスト プレースホルダー 2">
             <a:extLst>
               <a:ext uri="{FF2B5EF4-FFF2-40B4-BE49-F238E27FC236}">
-                <a16:creationId xmlns:a16="http://schemas.microsoft.com/office/drawing/2014/main" id="{43FDF861-8EA2-1CB5-3F83-48D8F02827F2}"/>
+                <a16:creationId xmlns:a16="http://schemas.microsoft.com/office/drawing/2014/main" id="{7779C082-AD6E-DB1D-14F3-F8B7EFE98DFD}"/>
               </a:ext>
             </a:extLst>
           </p:cNvPr>
@@ -471,7 +471,7 @@
           <p:cNvPr id="4" name="日付プレースホルダー 3">
             <a:extLst>
               <a:ext uri="{FF2B5EF4-FFF2-40B4-BE49-F238E27FC236}">
-                <a16:creationId xmlns:a16="http://schemas.microsoft.com/office/drawing/2014/main" id="{64076433-263E-DA6B-7914-7B5F33C71BE9}"/>
+                <a16:creationId xmlns:a16="http://schemas.microsoft.com/office/drawing/2014/main" id="{E3B6B94C-4AA0-0D9B-2400-CD3C19FA0BDC}"/>
               </a:ext>
             </a:extLst>
           </p:cNvPr>
@@ -487,7 +487,7 @@
           <a:bodyPr/>
           <a:lstStyle/>
           <a:p>
-            <a:fld id="{AE9D6548-C5E3-492D-A702-05323CE26A99}" type="datetimeFigureOut">
+            <a:fld id="{756D82B8-411E-469B-BBE6-EBAC5228C797}" type="datetimeFigureOut">
               <a:rPr kumimoji="1" lang="ja-JP" altLang="en-US" smtClean="0"/>
               <a:t>2026/7/30</a:t>
             </a:fld>
@@ -500,7 +500,7 @@
           <p:cNvPr id="5" name="フッター プレースホルダー 4">
             <a:extLst>
               <a:ext uri="{FF2B5EF4-FFF2-40B4-BE49-F238E27FC236}">
-                <a16:creationId xmlns:a16="http://schemas.microsoft.com/office/drawing/2014/main" id="{6F69DA6B-A707-6248-3BE7-93DB045C45C6}"/>
+                <a16:creationId xmlns:a16="http://schemas.microsoft.com/office/drawing/2014/main" id="{FBF8F79F-C1BC-D476-6AB0-75A9DA7BDB9D}"/>
               </a:ext>
             </a:extLst>
           </p:cNvPr>
@@ -525,7 +525,7 @@
           <p:cNvPr id="6" name="スライド番号プレースホルダー 5">
             <a:extLst>
               <a:ext uri="{FF2B5EF4-FFF2-40B4-BE49-F238E27FC236}">
-                <a16:creationId xmlns:a16="http://schemas.microsoft.com/office/drawing/2014/main" id="{8B597C26-CCD3-1DEB-FFE2-8D7DE3FEE324}"/>
+                <a16:creationId xmlns:a16="http://schemas.microsoft.com/office/drawing/2014/main" id="{61A79DA5-D322-8A69-B31D-C32235C82F85}"/>
               </a:ext>
             </a:extLst>
           </p:cNvPr>
@@ -541,7 +541,7 @@
           <a:bodyPr/>
           <a:lstStyle/>
           <a:p>
-            <a:fld id="{4108343C-E8EC-49DB-9DFF-47DF045E7F59}" type="slidenum">
+            <a:fld id="{CD25CDC0-E257-4732-8712-ED5468484ED4}" type="slidenum">
               <a:rPr kumimoji="1" lang="ja-JP" altLang="en-US" smtClean="0"/>
               <a:t>‹#›</a:t>
             </a:fld>
@@ -552,7 +552,7 @@
     </p:spTree>
     <p:extLst>
       <p:ext uri="{BB962C8B-B14F-4D97-AF65-F5344CB8AC3E}">
-        <p14:creationId xmlns:p14="http://schemas.microsoft.com/office/powerpoint/2010/main" val="2446234123"/>
+        <p14:creationId xmlns:p14="http://schemas.microsoft.com/office/powerpoint/2010/main" val="1209849348"/>
       </p:ext>
     </p:extLst>
   </p:cSld>
@@ -584,7 +584,7 @@
           <p:cNvPr id="2" name="縦書きタイトル 1">
             <a:extLst>
               <a:ext uri="{FF2B5EF4-FFF2-40B4-BE49-F238E27FC236}">
-                <a16:creationId xmlns:a16="http://schemas.microsoft.com/office/drawing/2014/main" id="{75EFF464-DADA-BE92-BEA4-EF111D318496}"/>
+                <a16:creationId xmlns:a16="http://schemas.microsoft.com/office/drawing/2014/main" id="{D1DE75E3-8CCF-253A-AA97-7D714747E046}"/>
               </a:ext>
             </a:extLst>
           </p:cNvPr>
@@ -617,7 +617,7 @@
           <p:cNvPr id="3" name="縦書きテキスト プレースホルダー 2">
             <a:extLst>
               <a:ext uri="{FF2B5EF4-FFF2-40B4-BE49-F238E27FC236}">
-                <a16:creationId xmlns:a16="http://schemas.microsoft.com/office/drawing/2014/main" id="{36343342-26C3-7695-5386-283B77D4D1D0}"/>
+                <a16:creationId xmlns:a16="http://schemas.microsoft.com/office/drawing/2014/main" id="{EB4C8B49-E509-04E2-BC54-19EF9D3E3913}"/>
               </a:ext>
             </a:extLst>
           </p:cNvPr>
@@ -711,7 +711,7 @@
           <p:cNvPr id="4" name="日付プレースホルダー 3">
             <a:extLst>
               <a:ext uri="{FF2B5EF4-FFF2-40B4-BE49-F238E27FC236}">
-                <a16:creationId xmlns:a16="http://schemas.microsoft.com/office/drawing/2014/main" id="{721C31A0-8968-E501-0568-98449673CFCC}"/>
+                <a16:creationId xmlns:a16="http://schemas.microsoft.com/office/drawing/2014/main" id="{0B5C5B2F-6BE2-003E-9B7A-7564A6A68CA1}"/>
               </a:ext>
             </a:extLst>
           </p:cNvPr>
@@ -727,7 +727,7 @@
           <a:bodyPr/>
           <a:lstStyle/>
           <a:p>
-            <a:fld id="{AE9D6548-C5E3-492D-A702-05323CE26A99}" type="datetimeFigureOut">
+            <a:fld id="{756D82B8-411E-469B-BBE6-EBAC5228C797}" type="datetimeFigureOut">
               <a:rPr kumimoji="1" lang="ja-JP" altLang="en-US" smtClean="0"/>
               <a:t>2026/7/30</a:t>
             </a:fld>
@@ -740,7 +740,7 @@
           <p:cNvPr id="5" name="フッター プレースホルダー 4">
             <a:extLst>
               <a:ext uri="{FF2B5EF4-FFF2-40B4-BE49-F238E27FC236}">
-                <a16:creationId xmlns:a16="http://schemas.microsoft.com/office/drawing/2014/main" id="{BE108824-C348-803D-BFE7-E2335D2EA684}"/>
+                <a16:creationId xmlns:a16="http://schemas.microsoft.com/office/drawing/2014/main" id="{4A692C4B-96CA-9E15-B2A0-428B65A25FFD}"/>
               </a:ext>
             </a:extLst>
           </p:cNvPr>
@@ -765,7 +765,7 @@
           <p:cNvPr id="6" name="スライド番号プレースホルダー 5">
             <a:extLst>
               <a:ext uri="{FF2B5EF4-FFF2-40B4-BE49-F238E27FC236}">
-                <a16:creationId xmlns:a16="http://schemas.microsoft.com/office/drawing/2014/main" id="{F5B5E391-8091-F857-A505-782889239CED}"/>
+                <a16:creationId xmlns:a16="http://schemas.microsoft.com/office/drawing/2014/main" id="{E2C84CA2-3297-232B-E9C1-9CD054DCC5F1}"/>
               </a:ext>
             </a:extLst>
           </p:cNvPr>
@@ -781,7 +781,7 @@
           <a:bodyPr/>
           <a:lstStyle/>
           <a:p>
-            <a:fld id="{4108343C-E8EC-49DB-9DFF-47DF045E7F59}" type="slidenum">
+            <a:fld id="{CD25CDC0-E257-4732-8712-ED5468484ED4}" type="slidenum">
               <a:rPr kumimoji="1" lang="ja-JP" altLang="en-US" smtClean="0"/>
               <a:t>‹#›</a:t>
             </a:fld>
@@ -792,7 +792,7 @@
     </p:spTree>
     <p:extLst>
       <p:ext uri="{BB962C8B-B14F-4D97-AF65-F5344CB8AC3E}">
-        <p14:creationId xmlns:p14="http://schemas.microsoft.com/office/powerpoint/2010/main" val="4852468"/>
+        <p14:creationId xmlns:p14="http://schemas.microsoft.com/office/powerpoint/2010/main" val="2447314978"/>
       </p:ext>
     </p:extLst>
   </p:cSld>
@@ -824,7 +824,7 @@
           <p:cNvPr id="2" name="タイトル 1">
             <a:extLst>
               <a:ext uri="{FF2B5EF4-FFF2-40B4-BE49-F238E27FC236}">
-                <a16:creationId xmlns:a16="http://schemas.microsoft.com/office/drawing/2014/main" id="{D55ACA4D-9738-272A-5B1A-DE68BA4A4E1E}"/>
+                <a16:creationId xmlns:a16="http://schemas.microsoft.com/office/drawing/2014/main" id="{988C61AB-09E9-2BFA-1DA4-4D969B2D3344}"/>
               </a:ext>
             </a:extLst>
           </p:cNvPr>
@@ -852,7 +852,7 @@
           <p:cNvPr id="3" name="コンテンツ プレースホルダー 2">
             <a:extLst>
               <a:ext uri="{FF2B5EF4-FFF2-40B4-BE49-F238E27FC236}">
-                <a16:creationId xmlns:a16="http://schemas.microsoft.com/office/drawing/2014/main" id="{5CBB6B40-4037-7617-FA30-CEEE61160E2C}"/>
+                <a16:creationId xmlns:a16="http://schemas.microsoft.com/office/drawing/2014/main" id="{AC658120-3AD0-8300-944B-E806301C21D8}"/>
               </a:ext>
             </a:extLst>
           </p:cNvPr>
@@ -941,7 +941,7 @@
           <p:cNvPr id="4" name="日付プレースホルダー 3">
             <a:extLst>
               <a:ext uri="{FF2B5EF4-FFF2-40B4-BE49-F238E27FC236}">
-                <a16:creationId xmlns:a16="http://schemas.microsoft.com/office/drawing/2014/main" id="{12F4B69A-55C5-0EB7-53FA-88C58E570A08}"/>
+                <a16:creationId xmlns:a16="http://schemas.microsoft.com/office/drawing/2014/main" id="{A0D625C4-E06A-E419-5B94-F121664A744E}"/>
               </a:ext>
             </a:extLst>
           </p:cNvPr>
@@ -957,7 +957,7 @@
           <a:bodyPr/>
           <a:lstStyle/>
           <a:p>
-            <a:fld id="{AE9D6548-C5E3-492D-A702-05323CE26A99}" type="datetimeFigureOut">
+            <a:fld id="{756D82B8-411E-469B-BBE6-EBAC5228C797}" type="datetimeFigureOut">
               <a:rPr kumimoji="1" lang="ja-JP" altLang="en-US" smtClean="0"/>
               <a:t>2026/7/30</a:t>
             </a:fld>
@@ -970,7 +970,7 @@
           <p:cNvPr id="5" name="フッター プレースホルダー 4">
             <a:extLst>
               <a:ext uri="{FF2B5EF4-FFF2-40B4-BE49-F238E27FC236}">
-                <a16:creationId xmlns:a16="http://schemas.microsoft.com/office/drawing/2014/main" id="{097E32C5-5FEE-9E5A-3D6F-A8E6BCD84881}"/>
+                <a16:creationId xmlns:a16="http://schemas.microsoft.com/office/drawing/2014/main" id="{02EA044A-C3BA-AF94-641B-8E92FAA88341}"/>
               </a:ext>
             </a:extLst>
           </p:cNvPr>
@@ -995,7 +995,7 @@
           <p:cNvPr id="6" name="スライド番号プレースホルダー 5">
             <a:extLst>
               <a:ext uri="{FF2B5EF4-FFF2-40B4-BE49-F238E27FC236}">
-                <a16:creationId xmlns:a16="http://schemas.microsoft.com/office/drawing/2014/main" id="{254F3038-DCBD-22B2-9D0E-F76CACAC6B1A}"/>
+                <a16:creationId xmlns:a16="http://schemas.microsoft.com/office/drawing/2014/main" id="{9F907FA9-9A6A-3DF0-6670-D658E1970886}"/>
               </a:ext>
             </a:extLst>
           </p:cNvPr>
@@ -1011,7 +1011,7 @@
           <a:bodyPr/>
           <a:lstStyle/>
           <a:p>
-            <a:fld id="{4108343C-E8EC-49DB-9DFF-47DF045E7F59}" type="slidenum">
+            <a:fld id="{CD25CDC0-E257-4732-8712-ED5468484ED4}" type="slidenum">
               <a:rPr kumimoji="1" lang="ja-JP" altLang="en-US" smtClean="0"/>
               <a:t>‹#›</a:t>
             </a:fld>
@@ -1022,7 +1022,7 @@
     </p:spTree>
     <p:extLst>
       <p:ext uri="{BB962C8B-B14F-4D97-AF65-F5344CB8AC3E}">
-        <p14:creationId xmlns:p14="http://schemas.microsoft.com/office/powerpoint/2010/main" val="3308374354"/>
+        <p14:creationId xmlns:p14="http://schemas.microsoft.com/office/powerpoint/2010/main" val="3275051938"/>
       </p:ext>
     </p:extLst>
   </p:cSld>
@@ -1054,7 +1054,7 @@
           <p:cNvPr id="2" name="タイトル 1">
             <a:extLst>
               <a:ext uri="{FF2B5EF4-FFF2-40B4-BE49-F238E27FC236}">
-                <a16:creationId xmlns:a16="http://schemas.microsoft.com/office/drawing/2014/main" id="{56453371-3196-950A-6B95-478A72D1ACAE}"/>
+                <a16:creationId xmlns:a16="http://schemas.microsoft.com/office/drawing/2014/main" id="{6E1017CF-9270-3D3D-1498-D4F690EEEB2B}"/>
               </a:ext>
             </a:extLst>
           </p:cNvPr>
@@ -1091,7 +1091,7 @@
           <p:cNvPr id="3" name="テキスト プレースホルダー 2">
             <a:extLst>
               <a:ext uri="{FF2B5EF4-FFF2-40B4-BE49-F238E27FC236}">
-                <a16:creationId xmlns:a16="http://schemas.microsoft.com/office/drawing/2014/main" id="{4A9BE2DF-55FB-70C3-6DDE-E12F6A62D5B0}"/>
+                <a16:creationId xmlns:a16="http://schemas.microsoft.com/office/drawing/2014/main" id="{D8D3B8B3-1E86-1106-364B-47F1E5BCD162}"/>
               </a:ext>
             </a:extLst>
           </p:cNvPr>
@@ -1216,7 +1216,7 @@
           <p:cNvPr id="4" name="日付プレースホルダー 3">
             <a:extLst>
               <a:ext uri="{FF2B5EF4-FFF2-40B4-BE49-F238E27FC236}">
-                <a16:creationId xmlns:a16="http://schemas.microsoft.com/office/drawing/2014/main" id="{67E16C10-4F50-A26D-2C45-7CBB1B96D780}"/>
+                <a16:creationId xmlns:a16="http://schemas.microsoft.com/office/drawing/2014/main" id="{00575500-1D29-DA91-235A-18CA6E1B9B36}"/>
               </a:ext>
             </a:extLst>
           </p:cNvPr>
@@ -1232,7 +1232,7 @@
           <a:bodyPr/>
           <a:lstStyle/>
           <a:p>
-            <a:fld id="{AE9D6548-C5E3-492D-A702-05323CE26A99}" type="datetimeFigureOut">
+            <a:fld id="{756D82B8-411E-469B-BBE6-EBAC5228C797}" type="datetimeFigureOut">
               <a:rPr kumimoji="1" lang="ja-JP" altLang="en-US" smtClean="0"/>
               <a:t>2026/7/30</a:t>
             </a:fld>
@@ -1245,7 +1245,7 @@
           <p:cNvPr id="5" name="フッター プレースホルダー 4">
             <a:extLst>
               <a:ext uri="{FF2B5EF4-FFF2-40B4-BE49-F238E27FC236}">
-                <a16:creationId xmlns:a16="http://schemas.microsoft.com/office/drawing/2014/main" id="{81A1BDD7-B60D-009E-FFC6-9F58CA459119}"/>
+                <a16:creationId xmlns:a16="http://schemas.microsoft.com/office/drawing/2014/main" id="{B3D747B6-C51F-6D82-CABF-181E4EFCCC04}"/>
               </a:ext>
             </a:extLst>
           </p:cNvPr>
@@ -1270,7 +1270,7 @@
           <p:cNvPr id="6" name="スライド番号プレースホルダー 5">
             <a:extLst>
               <a:ext uri="{FF2B5EF4-FFF2-40B4-BE49-F238E27FC236}">
-                <a16:creationId xmlns:a16="http://schemas.microsoft.com/office/drawing/2014/main" id="{52E0E977-77E7-1BD1-354D-45594C1A949F}"/>
+                <a16:creationId xmlns:a16="http://schemas.microsoft.com/office/drawing/2014/main" id="{3875F9E4-76DB-0601-B744-111CD3CF0B2E}"/>
               </a:ext>
             </a:extLst>
           </p:cNvPr>
@@ -1286,7 +1286,7 @@
           <a:bodyPr/>
           <a:lstStyle/>
           <a:p>
-            <a:fld id="{4108343C-E8EC-49DB-9DFF-47DF045E7F59}" type="slidenum">
+            <a:fld id="{CD25CDC0-E257-4732-8712-ED5468484ED4}" type="slidenum">
               <a:rPr kumimoji="1" lang="ja-JP" altLang="en-US" smtClean="0"/>
               <a:t>‹#›</a:t>
             </a:fld>
@@ -1297,7 +1297,7 @@
     </p:spTree>
     <p:extLst>
       <p:ext uri="{BB962C8B-B14F-4D97-AF65-F5344CB8AC3E}">
-        <p14:creationId xmlns:p14="http://schemas.microsoft.com/office/powerpoint/2010/main" val="629572458"/>
+        <p14:creationId xmlns:p14="http://schemas.microsoft.com/office/powerpoint/2010/main" val="4017982919"/>
       </p:ext>
     </p:extLst>
   </p:cSld>
@@ -1329,7 +1329,7 @@
           <p:cNvPr id="2" name="タイトル 1">
             <a:extLst>
               <a:ext uri="{FF2B5EF4-FFF2-40B4-BE49-F238E27FC236}">
-                <a16:creationId xmlns:a16="http://schemas.microsoft.com/office/drawing/2014/main" id="{900D7547-012C-B122-3192-DECCC44F7E21}"/>
+                <a16:creationId xmlns:a16="http://schemas.microsoft.com/office/drawing/2014/main" id="{D06A430B-495C-13F3-5CC5-10F2BC04A3D5}"/>
               </a:ext>
             </a:extLst>
           </p:cNvPr>
@@ -1357,7 +1357,7 @@
           <p:cNvPr id="3" name="コンテンツ プレースホルダー 2">
             <a:extLst>
               <a:ext uri="{FF2B5EF4-FFF2-40B4-BE49-F238E27FC236}">
-                <a16:creationId xmlns:a16="http://schemas.microsoft.com/office/drawing/2014/main" id="{98A405AC-FD5F-83C9-8131-2CA332EC826C}"/>
+                <a16:creationId xmlns:a16="http://schemas.microsoft.com/office/drawing/2014/main" id="{8D3A2F7A-61D5-5746-8FDB-9FA6CAEC5C9B}"/>
               </a:ext>
             </a:extLst>
           </p:cNvPr>
@@ -1451,7 +1451,7 @@
           <p:cNvPr id="4" name="コンテンツ プレースホルダー 3">
             <a:extLst>
               <a:ext uri="{FF2B5EF4-FFF2-40B4-BE49-F238E27FC236}">
-                <a16:creationId xmlns:a16="http://schemas.microsoft.com/office/drawing/2014/main" id="{9E3C1A34-646B-957D-0D86-26E5A00B5ED3}"/>
+                <a16:creationId xmlns:a16="http://schemas.microsoft.com/office/drawing/2014/main" id="{D6562751-B020-DB87-BDE5-A5773FDCDE2C}"/>
               </a:ext>
             </a:extLst>
           </p:cNvPr>
@@ -1545,7 +1545,7 @@
           <p:cNvPr id="5" name="日付プレースホルダー 4">
             <a:extLst>
               <a:ext uri="{FF2B5EF4-FFF2-40B4-BE49-F238E27FC236}">
-                <a16:creationId xmlns:a16="http://schemas.microsoft.com/office/drawing/2014/main" id="{F9C0FBCB-0978-0948-55C6-1D7AE1628179}"/>
+                <a16:creationId xmlns:a16="http://schemas.microsoft.com/office/drawing/2014/main" id="{B18B1D72-D652-9110-49DE-BC4C607711EA}"/>
               </a:ext>
             </a:extLst>
           </p:cNvPr>
@@ -1561,7 +1561,7 @@
           <a:bodyPr/>
           <a:lstStyle/>
           <a:p>
-            <a:fld id="{AE9D6548-C5E3-492D-A702-05323CE26A99}" type="datetimeFigureOut">
+            <a:fld id="{756D82B8-411E-469B-BBE6-EBAC5228C797}" type="datetimeFigureOut">
               <a:rPr kumimoji="1" lang="ja-JP" altLang="en-US" smtClean="0"/>
               <a:t>2026/7/30</a:t>
             </a:fld>
@@ -1574,7 +1574,7 @@
           <p:cNvPr id="6" name="フッター プレースホルダー 5">
             <a:extLst>
               <a:ext uri="{FF2B5EF4-FFF2-40B4-BE49-F238E27FC236}">
-                <a16:creationId xmlns:a16="http://schemas.microsoft.com/office/drawing/2014/main" id="{D0C4C211-709B-4841-22BE-8B916428B516}"/>
+                <a16:creationId xmlns:a16="http://schemas.microsoft.com/office/drawing/2014/main" id="{BFD62843-9B2F-5AD1-33E1-06A837839A57}"/>
               </a:ext>
             </a:extLst>
           </p:cNvPr>
@@ -1599,7 +1599,7 @@
           <p:cNvPr id="7" name="スライド番号プレースホルダー 6">
             <a:extLst>
               <a:ext uri="{FF2B5EF4-FFF2-40B4-BE49-F238E27FC236}">
-                <a16:creationId xmlns:a16="http://schemas.microsoft.com/office/drawing/2014/main" id="{5D92F5FA-2193-6754-31E0-2E4ED1F4A344}"/>
+                <a16:creationId xmlns:a16="http://schemas.microsoft.com/office/drawing/2014/main" id="{B8A30AFA-5A7C-CFBB-CB7F-E6A60FAB533B}"/>
               </a:ext>
             </a:extLst>
           </p:cNvPr>
@@ -1615,7 +1615,7 @@
           <a:bodyPr/>
           <a:lstStyle/>
           <a:p>
-            <a:fld id="{4108343C-E8EC-49DB-9DFF-47DF045E7F59}" type="slidenum">
+            <a:fld id="{CD25CDC0-E257-4732-8712-ED5468484ED4}" type="slidenum">
               <a:rPr kumimoji="1" lang="ja-JP" altLang="en-US" smtClean="0"/>
               <a:t>‹#›</a:t>
             </a:fld>
@@ -1626,7 +1626,7 @@
     </p:spTree>
     <p:extLst>
       <p:ext uri="{BB962C8B-B14F-4D97-AF65-F5344CB8AC3E}">
-        <p14:creationId xmlns:p14="http://schemas.microsoft.com/office/powerpoint/2010/main" val="3563430291"/>
+        <p14:creationId xmlns:p14="http://schemas.microsoft.com/office/powerpoint/2010/main" val="156034731"/>
       </p:ext>
     </p:extLst>
   </p:cSld>
@@ -1658,7 +1658,7 @@
           <p:cNvPr id="2" name="タイトル 1">
             <a:extLst>
               <a:ext uri="{FF2B5EF4-FFF2-40B4-BE49-F238E27FC236}">
-                <a16:creationId xmlns:a16="http://schemas.microsoft.com/office/drawing/2014/main" id="{34A88AEE-5CA0-FA20-8FF8-B00459F1C92E}"/>
+                <a16:creationId xmlns:a16="http://schemas.microsoft.com/office/drawing/2014/main" id="{70CA3CCA-1E07-83AF-FD0D-6A220447C2FF}"/>
               </a:ext>
             </a:extLst>
           </p:cNvPr>
@@ -1691,7 +1691,7 @@
           <p:cNvPr id="3" name="テキスト プレースホルダー 2">
             <a:extLst>
               <a:ext uri="{FF2B5EF4-FFF2-40B4-BE49-F238E27FC236}">
-                <a16:creationId xmlns:a16="http://schemas.microsoft.com/office/drawing/2014/main" id="{778797AD-A0F9-4F00-A97B-71D1C4F61317}"/>
+                <a16:creationId xmlns:a16="http://schemas.microsoft.com/office/drawing/2014/main" id="{7FCB0BFC-CF4B-FD4E-CB87-1C1B5CF79D51}"/>
               </a:ext>
             </a:extLst>
           </p:cNvPr>
@@ -1762,7 +1762,7 @@
           <p:cNvPr id="4" name="コンテンツ プレースホルダー 3">
             <a:extLst>
               <a:ext uri="{FF2B5EF4-FFF2-40B4-BE49-F238E27FC236}">
-                <a16:creationId xmlns:a16="http://schemas.microsoft.com/office/drawing/2014/main" id="{290D01D1-165B-DF0A-E9FB-28A3484EE89D}"/>
+                <a16:creationId xmlns:a16="http://schemas.microsoft.com/office/drawing/2014/main" id="{FEDAFB33-CAA7-1024-D1E9-D490AB31CC6C}"/>
               </a:ext>
             </a:extLst>
           </p:cNvPr>
@@ -1856,7 +1856,7 @@
           <p:cNvPr id="5" name="テキスト プレースホルダー 4">
             <a:extLst>
               <a:ext uri="{FF2B5EF4-FFF2-40B4-BE49-F238E27FC236}">
-                <a16:creationId xmlns:a16="http://schemas.microsoft.com/office/drawing/2014/main" id="{07508608-9126-5323-8AFC-930E70C36424}"/>
+                <a16:creationId xmlns:a16="http://schemas.microsoft.com/office/drawing/2014/main" id="{9E62F49E-C641-09FE-DAC8-27C347917F88}"/>
               </a:ext>
             </a:extLst>
           </p:cNvPr>
@@ -1927,7 +1927,7 @@
           <p:cNvPr id="6" name="コンテンツ プレースホルダー 5">
             <a:extLst>
               <a:ext uri="{FF2B5EF4-FFF2-40B4-BE49-F238E27FC236}">
-                <a16:creationId xmlns:a16="http://schemas.microsoft.com/office/drawing/2014/main" id="{2B06A077-AD20-DD2D-D137-A78529CF6463}"/>
+                <a16:creationId xmlns:a16="http://schemas.microsoft.com/office/drawing/2014/main" id="{B7688845-95CF-DACE-9BC2-4ADE02663FF3}"/>
               </a:ext>
             </a:extLst>
           </p:cNvPr>
@@ -2021,7 +2021,7 @@
           <p:cNvPr id="7" name="日付プレースホルダー 6">
             <a:extLst>
               <a:ext uri="{FF2B5EF4-FFF2-40B4-BE49-F238E27FC236}">
-                <a16:creationId xmlns:a16="http://schemas.microsoft.com/office/drawing/2014/main" id="{6BC3106E-F7E9-1AD3-2B04-A2C9C856D478}"/>
+                <a16:creationId xmlns:a16="http://schemas.microsoft.com/office/drawing/2014/main" id="{DFA37181-726B-A6BD-B16C-D86EE6645034}"/>
               </a:ext>
             </a:extLst>
           </p:cNvPr>
@@ -2037,7 +2037,7 @@
           <a:bodyPr/>
           <a:lstStyle/>
           <a:p>
-            <a:fld id="{AE9D6548-C5E3-492D-A702-05323CE26A99}" type="datetimeFigureOut">
+            <a:fld id="{756D82B8-411E-469B-BBE6-EBAC5228C797}" type="datetimeFigureOut">
               <a:rPr kumimoji="1" lang="ja-JP" altLang="en-US" smtClean="0"/>
               <a:t>2026/7/30</a:t>
             </a:fld>
@@ -2050,7 +2050,7 @@
           <p:cNvPr id="8" name="フッター プレースホルダー 7">
             <a:extLst>
               <a:ext uri="{FF2B5EF4-FFF2-40B4-BE49-F238E27FC236}">
-                <a16:creationId xmlns:a16="http://schemas.microsoft.com/office/drawing/2014/main" id="{2D0BF858-56A4-7EDB-88B9-325C91F6FEFD}"/>
+                <a16:creationId xmlns:a16="http://schemas.microsoft.com/office/drawing/2014/main" id="{C50B1378-2736-8743-5358-BDBCDEEC9B8B}"/>
               </a:ext>
             </a:extLst>
           </p:cNvPr>
@@ -2075,7 +2075,7 @@
           <p:cNvPr id="9" name="スライド番号プレースホルダー 8">
             <a:extLst>
               <a:ext uri="{FF2B5EF4-FFF2-40B4-BE49-F238E27FC236}">
-                <a16:creationId xmlns:a16="http://schemas.microsoft.com/office/drawing/2014/main" id="{4A60781F-3D20-E86C-F437-F4A87F8853EE}"/>
+                <a16:creationId xmlns:a16="http://schemas.microsoft.com/office/drawing/2014/main" id="{39A299F5-58CA-F1FB-99AB-98BC212F2297}"/>
               </a:ext>
             </a:extLst>
           </p:cNvPr>
@@ -2091,7 +2091,7 @@
           <a:bodyPr/>
           <a:lstStyle/>
           <a:p>
-            <a:fld id="{4108343C-E8EC-49DB-9DFF-47DF045E7F59}" type="slidenum">
+            <a:fld id="{CD25CDC0-E257-4732-8712-ED5468484ED4}" type="slidenum">
               <a:rPr kumimoji="1" lang="ja-JP" altLang="en-US" smtClean="0"/>
               <a:t>‹#›</a:t>
             </a:fld>
@@ -2102,7 +2102,7 @@
     </p:spTree>
     <p:extLst>
       <p:ext uri="{BB962C8B-B14F-4D97-AF65-F5344CB8AC3E}">
-        <p14:creationId xmlns:p14="http://schemas.microsoft.com/office/powerpoint/2010/main" val="544501239"/>
+        <p14:creationId xmlns:p14="http://schemas.microsoft.com/office/powerpoint/2010/main" val="3158267110"/>
       </p:ext>
     </p:extLst>
   </p:cSld>
@@ -2134,7 +2134,7 @@
           <p:cNvPr id="2" name="タイトル 1">
             <a:extLst>
               <a:ext uri="{FF2B5EF4-FFF2-40B4-BE49-F238E27FC236}">
-                <a16:creationId xmlns:a16="http://schemas.microsoft.com/office/drawing/2014/main" id="{C986E393-DA3B-226E-0C10-B5BFEC06CF92}"/>
+                <a16:creationId xmlns:a16="http://schemas.microsoft.com/office/drawing/2014/main" id="{3F68243D-8E3B-0554-5D7D-B36DA573D82C}"/>
               </a:ext>
             </a:extLst>
           </p:cNvPr>
@@ -2162,7 +2162,7 @@
           <p:cNvPr id="3" name="日付プレースホルダー 2">
             <a:extLst>
               <a:ext uri="{FF2B5EF4-FFF2-40B4-BE49-F238E27FC236}">
-                <a16:creationId xmlns:a16="http://schemas.microsoft.com/office/drawing/2014/main" id="{4F958218-ADA8-3205-B0F5-DE7E8FCFB438}"/>
+                <a16:creationId xmlns:a16="http://schemas.microsoft.com/office/drawing/2014/main" id="{0AD178B7-4B39-8028-96EF-D76044F881EC}"/>
               </a:ext>
             </a:extLst>
           </p:cNvPr>
@@ -2178,7 +2178,7 @@
           <a:bodyPr/>
           <a:lstStyle/>
           <a:p>
-            <a:fld id="{AE9D6548-C5E3-492D-A702-05323CE26A99}" type="datetimeFigureOut">
+            <a:fld id="{756D82B8-411E-469B-BBE6-EBAC5228C797}" type="datetimeFigureOut">
               <a:rPr kumimoji="1" lang="ja-JP" altLang="en-US" smtClean="0"/>
               <a:t>2026/7/30</a:t>
             </a:fld>
@@ -2191,7 +2191,7 @@
           <p:cNvPr id="4" name="フッター プレースホルダー 3">
             <a:extLst>
               <a:ext uri="{FF2B5EF4-FFF2-40B4-BE49-F238E27FC236}">
-                <a16:creationId xmlns:a16="http://schemas.microsoft.com/office/drawing/2014/main" id="{7662AE5B-AC16-C5CB-0049-1193FC075C76}"/>
+                <a16:creationId xmlns:a16="http://schemas.microsoft.com/office/drawing/2014/main" id="{98491BBD-0C99-0AEF-65CC-E24764586B80}"/>
               </a:ext>
             </a:extLst>
           </p:cNvPr>
@@ -2216,7 +2216,7 @@
           <p:cNvPr id="5" name="スライド番号プレースホルダー 4">
             <a:extLst>
               <a:ext uri="{FF2B5EF4-FFF2-40B4-BE49-F238E27FC236}">
-                <a16:creationId xmlns:a16="http://schemas.microsoft.com/office/drawing/2014/main" id="{5403FF3D-8899-9D5C-D5BC-5C947EFC1B06}"/>
+                <a16:creationId xmlns:a16="http://schemas.microsoft.com/office/drawing/2014/main" id="{7F8B8A31-4312-F9A8-0DF0-5A9C2C7B91D7}"/>
               </a:ext>
             </a:extLst>
           </p:cNvPr>
@@ -2232,7 +2232,7 @@
           <a:bodyPr/>
           <a:lstStyle/>
           <a:p>
-            <a:fld id="{4108343C-E8EC-49DB-9DFF-47DF045E7F59}" type="slidenum">
+            <a:fld id="{CD25CDC0-E257-4732-8712-ED5468484ED4}" type="slidenum">
               <a:rPr kumimoji="1" lang="ja-JP" altLang="en-US" smtClean="0"/>
               <a:t>‹#›</a:t>
             </a:fld>
@@ -2243,7 +2243,7 @@
     </p:spTree>
     <p:extLst>
       <p:ext uri="{BB962C8B-B14F-4D97-AF65-F5344CB8AC3E}">
-        <p14:creationId xmlns:p14="http://schemas.microsoft.com/office/powerpoint/2010/main" val="2744817409"/>
+        <p14:creationId xmlns:p14="http://schemas.microsoft.com/office/powerpoint/2010/main" val="2476471168"/>
       </p:ext>
     </p:extLst>
   </p:cSld>
@@ -2275,7 +2275,7 @@
           <p:cNvPr id="2" name="日付プレースホルダー 1">
             <a:extLst>
               <a:ext uri="{FF2B5EF4-FFF2-40B4-BE49-F238E27FC236}">
-                <a16:creationId xmlns:a16="http://schemas.microsoft.com/office/drawing/2014/main" id="{F67BCB68-E558-BAE9-8C03-57FEE3AB362F}"/>
+                <a16:creationId xmlns:a16="http://schemas.microsoft.com/office/drawing/2014/main" id="{372A03BD-5B00-32C7-C84C-70CCB84BB3F9}"/>
               </a:ext>
             </a:extLst>
           </p:cNvPr>
@@ -2291,7 +2291,7 @@
           <a:bodyPr/>
           <a:lstStyle/>
           <a:p>
-            <a:fld id="{AE9D6548-C5E3-492D-A702-05323CE26A99}" type="datetimeFigureOut">
+            <a:fld id="{756D82B8-411E-469B-BBE6-EBAC5228C797}" type="datetimeFigureOut">
               <a:rPr kumimoji="1" lang="ja-JP" altLang="en-US" smtClean="0"/>
               <a:t>2026/7/30</a:t>
             </a:fld>
@@ -2304,7 +2304,7 @@
           <p:cNvPr id="3" name="フッター プレースホルダー 2">
             <a:extLst>
               <a:ext uri="{FF2B5EF4-FFF2-40B4-BE49-F238E27FC236}">
-                <a16:creationId xmlns:a16="http://schemas.microsoft.com/office/drawing/2014/main" id="{6B88E624-9781-FCD6-3347-9D19E6860A08}"/>
+                <a16:creationId xmlns:a16="http://schemas.microsoft.com/office/drawing/2014/main" id="{51C664F5-A3F9-D5F6-20DD-B7CC378E0DA3}"/>
               </a:ext>
             </a:extLst>
           </p:cNvPr>
@@ -2329,7 +2329,7 @@
           <p:cNvPr id="4" name="スライド番号プレースホルダー 3">
             <a:extLst>
               <a:ext uri="{FF2B5EF4-FFF2-40B4-BE49-F238E27FC236}">
-                <a16:creationId xmlns:a16="http://schemas.microsoft.com/office/drawing/2014/main" id="{307EEC4D-86A5-E97B-6363-3073D5CF260B}"/>
+                <a16:creationId xmlns:a16="http://schemas.microsoft.com/office/drawing/2014/main" id="{B42317DE-CAE2-C736-1B69-609D367468F6}"/>
               </a:ext>
             </a:extLst>
           </p:cNvPr>
@@ -2345,7 +2345,7 @@
           <a:bodyPr/>
           <a:lstStyle/>
           <a:p>
-            <a:fld id="{4108343C-E8EC-49DB-9DFF-47DF045E7F59}" type="slidenum">
+            <a:fld id="{CD25CDC0-E257-4732-8712-ED5468484ED4}" type="slidenum">
               <a:rPr kumimoji="1" lang="ja-JP" altLang="en-US" smtClean="0"/>
               <a:t>‹#›</a:t>
             </a:fld>
@@ -2356,7 +2356,7 @@
     </p:spTree>
     <p:extLst>
       <p:ext uri="{BB962C8B-B14F-4D97-AF65-F5344CB8AC3E}">
-        <p14:creationId xmlns:p14="http://schemas.microsoft.com/office/powerpoint/2010/main" val="548447470"/>
+        <p14:creationId xmlns:p14="http://schemas.microsoft.com/office/powerpoint/2010/main" val="2616912737"/>
       </p:ext>
     </p:extLst>
   </p:cSld>
@@ -2388,7 +2388,7 @@
           <p:cNvPr id="2" name="タイトル 1">
             <a:extLst>
               <a:ext uri="{FF2B5EF4-FFF2-40B4-BE49-F238E27FC236}">
-                <a16:creationId xmlns:a16="http://schemas.microsoft.com/office/drawing/2014/main" id="{F69FC341-8060-39A0-4A9B-AD9A68713B1C}"/>
+                <a16:creationId xmlns:a16="http://schemas.microsoft.com/office/drawing/2014/main" id="{2D95DC68-A52D-A607-FB61-44A17597A4B3}"/>
               </a:ext>
             </a:extLst>
           </p:cNvPr>
@@ -2425,7 +2425,7 @@
           <p:cNvPr id="3" name="コンテンツ プレースホルダー 2">
             <a:extLst>
               <a:ext uri="{FF2B5EF4-FFF2-40B4-BE49-F238E27FC236}">
-                <a16:creationId xmlns:a16="http://schemas.microsoft.com/office/drawing/2014/main" id="{94D4AE87-93B4-CC4D-E191-5F4D97FD4A76}"/>
+                <a16:creationId xmlns:a16="http://schemas.microsoft.com/office/drawing/2014/main" id="{064BB689-7D86-FE26-C3FB-909EBC77FB56}"/>
               </a:ext>
             </a:extLst>
           </p:cNvPr>
@@ -2547,7 +2547,7 @@
           <p:cNvPr id="4" name="テキスト プレースホルダー 3">
             <a:extLst>
               <a:ext uri="{FF2B5EF4-FFF2-40B4-BE49-F238E27FC236}">
-                <a16:creationId xmlns:a16="http://schemas.microsoft.com/office/drawing/2014/main" id="{A7D8DE86-DCB9-5E42-7261-5F4F20A809B7}"/>
+                <a16:creationId xmlns:a16="http://schemas.microsoft.com/office/drawing/2014/main" id="{372B33BA-B636-1A5B-9AF0-D6441ACAC239}"/>
               </a:ext>
             </a:extLst>
           </p:cNvPr>
@@ -2618,7 +2618,7 @@
           <p:cNvPr id="5" name="日付プレースホルダー 4">
             <a:extLst>
               <a:ext uri="{FF2B5EF4-FFF2-40B4-BE49-F238E27FC236}">
-                <a16:creationId xmlns:a16="http://schemas.microsoft.com/office/drawing/2014/main" id="{015E5E6D-DDD9-E0A9-5C2B-6AF21146717E}"/>
+                <a16:creationId xmlns:a16="http://schemas.microsoft.com/office/drawing/2014/main" id="{ACE4962A-5A1F-4BC8-30D8-84BC16CED709}"/>
               </a:ext>
             </a:extLst>
           </p:cNvPr>
@@ -2634,7 +2634,7 @@
           <a:bodyPr/>
           <a:lstStyle/>
           <a:p>
-            <a:fld id="{AE9D6548-C5E3-492D-A702-05323CE26A99}" type="datetimeFigureOut">
+            <a:fld id="{756D82B8-411E-469B-BBE6-EBAC5228C797}" type="datetimeFigureOut">
               <a:rPr kumimoji="1" lang="ja-JP" altLang="en-US" smtClean="0"/>
               <a:t>2026/7/30</a:t>
             </a:fld>
@@ -2647,7 +2647,7 @@
           <p:cNvPr id="6" name="フッター プレースホルダー 5">
             <a:extLst>
               <a:ext uri="{FF2B5EF4-FFF2-40B4-BE49-F238E27FC236}">
-                <a16:creationId xmlns:a16="http://schemas.microsoft.com/office/drawing/2014/main" id="{63135878-3735-8FF0-4F0E-D192099484C2}"/>
+                <a16:creationId xmlns:a16="http://schemas.microsoft.com/office/drawing/2014/main" id="{29161772-D29B-8A08-D4EB-1FC94A1FC9C7}"/>
               </a:ext>
             </a:extLst>
           </p:cNvPr>
@@ -2672,7 +2672,7 @@
           <p:cNvPr id="7" name="スライド番号プレースホルダー 6">
             <a:extLst>
               <a:ext uri="{FF2B5EF4-FFF2-40B4-BE49-F238E27FC236}">
-                <a16:creationId xmlns:a16="http://schemas.microsoft.com/office/drawing/2014/main" id="{4AD4A15B-B346-41D3-B755-C6B0139A0FB0}"/>
+                <a16:creationId xmlns:a16="http://schemas.microsoft.com/office/drawing/2014/main" id="{5004C5D2-4A8C-006D-7D78-3CD1233D2F4D}"/>
               </a:ext>
             </a:extLst>
           </p:cNvPr>
@@ -2688,7 +2688,7 @@
           <a:bodyPr/>
           <a:lstStyle/>
           <a:p>
-            <a:fld id="{4108343C-E8EC-49DB-9DFF-47DF045E7F59}" type="slidenum">
+            <a:fld id="{CD25CDC0-E257-4732-8712-ED5468484ED4}" type="slidenum">
               <a:rPr kumimoji="1" lang="ja-JP" altLang="en-US" smtClean="0"/>
               <a:t>‹#›</a:t>
             </a:fld>
@@ -2699,7 +2699,7 @@
     </p:spTree>
     <p:extLst>
       <p:ext uri="{BB962C8B-B14F-4D97-AF65-F5344CB8AC3E}">
-        <p14:creationId xmlns:p14="http://schemas.microsoft.com/office/powerpoint/2010/main" val="2326437392"/>
+        <p14:creationId xmlns:p14="http://schemas.microsoft.com/office/powerpoint/2010/main" val="105324306"/>
       </p:ext>
     </p:extLst>
   </p:cSld>
@@ -2731,7 +2731,7 @@
           <p:cNvPr id="2" name="タイトル 1">
             <a:extLst>
               <a:ext uri="{FF2B5EF4-FFF2-40B4-BE49-F238E27FC236}">
-                <a16:creationId xmlns:a16="http://schemas.microsoft.com/office/drawing/2014/main" id="{233742F6-A9E4-34A8-CB41-696EAB818BAB}"/>
+                <a16:creationId xmlns:a16="http://schemas.microsoft.com/office/drawing/2014/main" id="{F3994999-43EF-D0B4-7318-597E8D375A00}"/>
               </a:ext>
             </a:extLst>
           </p:cNvPr>
@@ -2768,7 +2768,7 @@
           <p:cNvPr id="3" name="図プレースホルダー 2">
             <a:extLst>
               <a:ext uri="{FF2B5EF4-FFF2-40B4-BE49-F238E27FC236}">
-                <a16:creationId xmlns:a16="http://schemas.microsoft.com/office/drawing/2014/main" id="{BD311F95-DE0D-9ACF-B106-B0582960320D}"/>
+                <a16:creationId xmlns:a16="http://schemas.microsoft.com/office/drawing/2014/main" id="{D566D563-B664-E97B-C5BD-AAF43AAD1003}"/>
               </a:ext>
             </a:extLst>
           </p:cNvPr>
@@ -2835,7 +2835,7 @@
           <p:cNvPr id="4" name="テキスト プレースホルダー 3">
             <a:extLst>
               <a:ext uri="{FF2B5EF4-FFF2-40B4-BE49-F238E27FC236}">
-                <a16:creationId xmlns:a16="http://schemas.microsoft.com/office/drawing/2014/main" id="{39F60BBB-93CB-F456-5C91-F9E92BEA601A}"/>
+                <a16:creationId xmlns:a16="http://schemas.microsoft.com/office/drawing/2014/main" id="{A1DE2013-FD9D-1946-C78F-9A219F40B40E}"/>
               </a:ext>
             </a:extLst>
           </p:cNvPr>
@@ -2906,7 +2906,7 @@
           <p:cNvPr id="5" name="日付プレースホルダー 4">
             <a:extLst>
               <a:ext uri="{FF2B5EF4-FFF2-40B4-BE49-F238E27FC236}">
-                <a16:creationId xmlns:a16="http://schemas.microsoft.com/office/drawing/2014/main" id="{AA336ADE-5826-3D98-6028-E01B836484DD}"/>
+                <a16:creationId xmlns:a16="http://schemas.microsoft.com/office/drawing/2014/main" id="{ADBE4B57-AFAF-0D4C-F263-7262F6E4F173}"/>
               </a:ext>
             </a:extLst>
           </p:cNvPr>
@@ -2922,7 +2922,7 @@
           <a:bodyPr/>
           <a:lstStyle/>
           <a:p>
-            <a:fld id="{AE9D6548-C5E3-492D-A702-05323CE26A99}" type="datetimeFigureOut">
+            <a:fld id="{756D82B8-411E-469B-BBE6-EBAC5228C797}" type="datetimeFigureOut">
               <a:rPr kumimoji="1" lang="ja-JP" altLang="en-US" smtClean="0"/>
               <a:t>2026/7/30</a:t>
             </a:fld>
@@ -2935,7 +2935,7 @@
           <p:cNvPr id="6" name="フッター プレースホルダー 5">
             <a:extLst>
               <a:ext uri="{FF2B5EF4-FFF2-40B4-BE49-F238E27FC236}">
-                <a16:creationId xmlns:a16="http://schemas.microsoft.com/office/drawing/2014/main" id="{7184B536-E529-9FF1-89CC-F52AEF0848CD}"/>
+                <a16:creationId xmlns:a16="http://schemas.microsoft.com/office/drawing/2014/main" id="{53355758-FD6A-6F54-DBFE-C7D10141F826}"/>
               </a:ext>
             </a:extLst>
           </p:cNvPr>
@@ -2960,7 +2960,7 @@
           <p:cNvPr id="7" name="スライド番号プレースホルダー 6">
             <a:extLst>
               <a:ext uri="{FF2B5EF4-FFF2-40B4-BE49-F238E27FC236}">
-                <a16:creationId xmlns:a16="http://schemas.microsoft.com/office/drawing/2014/main" id="{8AF2FBC4-299A-FF36-C5EB-BB67D7F76FB0}"/>
+                <a16:creationId xmlns:a16="http://schemas.microsoft.com/office/drawing/2014/main" id="{A2B49ED4-FA1D-EE1E-D398-703845E09A19}"/>
               </a:ext>
             </a:extLst>
           </p:cNvPr>
@@ -2976,7 +2976,7 @@
           <a:bodyPr/>
           <a:lstStyle/>
           <a:p>
-            <a:fld id="{4108343C-E8EC-49DB-9DFF-47DF045E7F59}" type="slidenum">
+            <a:fld id="{CD25CDC0-E257-4732-8712-ED5468484ED4}" type="slidenum">
               <a:rPr kumimoji="1" lang="ja-JP" altLang="en-US" smtClean="0"/>
               <a:t>‹#›</a:t>
             </a:fld>
@@ -2987,7 +2987,7 @@
     </p:spTree>
     <p:extLst>
       <p:ext uri="{BB962C8B-B14F-4D97-AF65-F5344CB8AC3E}">
-        <p14:creationId xmlns:p14="http://schemas.microsoft.com/office/powerpoint/2010/main" val="337713073"/>
+        <p14:creationId xmlns:p14="http://schemas.microsoft.com/office/powerpoint/2010/main" val="2700673138"/>
       </p:ext>
     </p:extLst>
   </p:cSld>
@@ -3024,7 +3024,7 @@
           <p:cNvPr id="2" name="タイトル プレースホルダー 1">
             <a:extLst>
               <a:ext uri="{FF2B5EF4-FFF2-40B4-BE49-F238E27FC236}">
-                <a16:creationId xmlns:a16="http://schemas.microsoft.com/office/drawing/2014/main" id="{975289FA-C57E-D772-4C73-25DC7E4A0B9E}"/>
+                <a16:creationId xmlns:a16="http://schemas.microsoft.com/office/drawing/2014/main" id="{E08C54AE-6950-A030-6855-EDC81D4DE4AB}"/>
               </a:ext>
             </a:extLst>
           </p:cNvPr>
@@ -3062,7 +3062,7 @@
           <p:cNvPr id="3" name="テキスト プレースホルダー 2">
             <a:extLst>
               <a:ext uri="{FF2B5EF4-FFF2-40B4-BE49-F238E27FC236}">
-                <a16:creationId xmlns:a16="http://schemas.microsoft.com/office/drawing/2014/main" id="{C0B0265B-F6AD-15D5-6D9F-35B22747A63B}"/>
+                <a16:creationId xmlns:a16="http://schemas.microsoft.com/office/drawing/2014/main" id="{136E2795-3734-9096-78C0-9200C8DB3BC4}"/>
               </a:ext>
             </a:extLst>
           </p:cNvPr>
@@ -3161,7 +3161,7 @@
           <p:cNvPr id="4" name="日付プレースホルダー 3">
             <a:extLst>
               <a:ext uri="{FF2B5EF4-FFF2-40B4-BE49-F238E27FC236}">
-                <a16:creationId xmlns:a16="http://schemas.microsoft.com/office/drawing/2014/main" id="{6EFAFB50-3B72-BC11-2CF4-34E1231C7268}"/>
+                <a16:creationId xmlns:a16="http://schemas.microsoft.com/office/drawing/2014/main" id="{F97A57C7-9B5B-D397-3ABD-8DFA1BA14407}"/>
               </a:ext>
             </a:extLst>
           </p:cNvPr>
@@ -3195,7 +3195,7 @@
             </a:lvl1pPr>
           </a:lstStyle>
           <a:p>
-            <a:fld id="{AE9D6548-C5E3-492D-A702-05323CE26A99}" type="datetimeFigureOut">
+            <a:fld id="{756D82B8-411E-469B-BBE6-EBAC5228C797}" type="datetimeFigureOut">
               <a:rPr kumimoji="1" lang="ja-JP" altLang="en-US" smtClean="0"/>
               <a:t>2026/7/30</a:t>
             </a:fld>
@@ -3208,7 +3208,7 @@
           <p:cNvPr id="5" name="フッター プレースホルダー 4">
             <a:extLst>
               <a:ext uri="{FF2B5EF4-FFF2-40B4-BE49-F238E27FC236}">
-                <a16:creationId xmlns:a16="http://schemas.microsoft.com/office/drawing/2014/main" id="{9E536039-F95A-3E11-C717-772F42C09A41}"/>
+                <a16:creationId xmlns:a16="http://schemas.microsoft.com/office/drawing/2014/main" id="{FD4F225E-C205-94A2-6D2B-05FDA1F33A63}"/>
               </a:ext>
             </a:extLst>
           </p:cNvPr>
@@ -3251,7 +3251,7 @@
           <p:cNvPr id="6" name="スライド番号プレースホルダー 5">
             <a:extLst>
               <a:ext uri="{FF2B5EF4-FFF2-40B4-BE49-F238E27FC236}">
-                <a16:creationId xmlns:a16="http://schemas.microsoft.com/office/drawing/2014/main" id="{AD420E33-8F2A-AB14-BBF8-92CD77D12AA5}"/>
+                <a16:creationId xmlns:a16="http://schemas.microsoft.com/office/drawing/2014/main" id="{B106EB0F-34E7-F70A-6EF9-EB167FF3F46D}"/>
               </a:ext>
             </a:extLst>
           </p:cNvPr>
@@ -3285,7 +3285,7 @@
             </a:lvl1pPr>
           </a:lstStyle>
           <a:p>
-            <a:fld id="{4108343C-E8EC-49DB-9DFF-47DF045E7F59}" type="slidenum">
+            <a:fld id="{CD25CDC0-E257-4732-8712-ED5468484ED4}" type="slidenum">
               <a:rPr kumimoji="1" lang="ja-JP" altLang="en-US" smtClean="0"/>
               <a:t>‹#›</a:t>
             </a:fld>
@@ -3296,7 +3296,7 @@
     </p:spTree>
     <p:extLst>
       <p:ext uri="{BB962C8B-B14F-4D97-AF65-F5344CB8AC3E}">
-        <p14:creationId xmlns:p14="http://schemas.microsoft.com/office/powerpoint/2010/main" val="600430835"/>
+        <p14:creationId xmlns:p14="http://schemas.microsoft.com/office/powerpoint/2010/main" val="1650728320"/>
       </p:ext>
     </p:extLst>
   </p:cSld>
@@ -3619,7 +3619,7 @@
           <p:cNvPr id="2" name="テキスト ボックス 1">
             <a:extLst>
               <a:ext uri="{FF2B5EF4-FFF2-40B4-BE49-F238E27FC236}">
-                <a16:creationId xmlns:a16="http://schemas.microsoft.com/office/drawing/2014/main" id="{7CCE149F-63D2-24D7-A229-AB23118C7649}"/>
+                <a16:creationId xmlns:a16="http://schemas.microsoft.com/office/drawing/2014/main" id="{0214D317-3646-A81A-F48E-E4D87BB73331}"/>
               </a:ext>
             </a:extLst>
           </p:cNvPr>
@@ -3665,7 +3665,7 @@
           <p:cNvPr id="3" name="テキスト ボックス 2">
             <a:extLst>
               <a:ext uri="{FF2B5EF4-FFF2-40B4-BE49-F238E27FC236}">
-                <a16:creationId xmlns:a16="http://schemas.microsoft.com/office/drawing/2014/main" id="{24F96EC5-0F64-D9B0-B0BB-699EAF6163B0}"/>
+                <a16:creationId xmlns:a16="http://schemas.microsoft.com/office/drawing/2014/main" id="{17235E84-B2E8-1A63-B65B-18C67C6502E8}"/>
               </a:ext>
             </a:extLst>
           </p:cNvPr>
@@ -3714,7 +3714,7 @@
           <p:cNvPr id="4" name="テキスト ボックス 3">
             <a:extLst>
               <a:ext uri="{FF2B5EF4-FFF2-40B4-BE49-F238E27FC236}">
-                <a16:creationId xmlns:a16="http://schemas.microsoft.com/office/drawing/2014/main" id="{79DF5358-AE0D-A8F7-9A2C-7A023F2D59A5}"/>
+                <a16:creationId xmlns:a16="http://schemas.microsoft.com/office/drawing/2014/main" id="{4329F0EB-9550-B337-55ED-BC95C994C34D}"/>
               </a:ext>
             </a:extLst>
           </p:cNvPr>
@@ -3754,7 +3754,7 @@
           <p:cNvPr id="5" name="テキスト ボックス 4">
             <a:extLst>
               <a:ext uri="{FF2B5EF4-FFF2-40B4-BE49-F238E27FC236}">
-                <a16:creationId xmlns:a16="http://schemas.microsoft.com/office/drawing/2014/main" id="{20E504A2-7F48-1795-2667-749B1AA54221}"/>
+                <a16:creationId xmlns:a16="http://schemas.microsoft.com/office/drawing/2014/main" id="{F6B8D34B-4A46-E1D4-32B8-8CFC095359A1}"/>
               </a:ext>
             </a:extLst>
           </p:cNvPr>
@@ -3801,7 +3801,7 @@
             <a:hlinkClick r:id="" action="ppaction://media"/>
             <a:extLst>
               <a:ext uri="{FF2B5EF4-FFF2-40B4-BE49-F238E27FC236}">
-                <a16:creationId xmlns:a16="http://schemas.microsoft.com/office/drawing/2014/main" id="{D9C7AFFC-4374-0ED3-AC1C-60DECEAC2BA6}"/>
+                <a16:creationId xmlns:a16="http://schemas.microsoft.com/office/drawing/2014/main" id="{4232D43C-EC57-3F18-EA52-BA3439A16680}"/>
               </a:ext>
             </a:extLst>
           </p:cNvPr>
@@ -3836,7 +3836,7 @@
     </p:spTree>
     <p:extLst>
       <p:ext uri="{BB962C8B-B14F-4D97-AF65-F5344CB8AC3E}">
-        <p14:creationId xmlns:p14="http://schemas.microsoft.com/office/powerpoint/2010/main" val="1448425594"/>
+        <p14:creationId xmlns:p14="http://schemas.microsoft.com/office/powerpoint/2010/main" val="4049137739"/>
       </p:ext>
     </p:extLst>
   </p:cSld>
@@ -3960,7 +3960,7 @@
           <p:cNvPr id="2" name="テキスト ボックス 1">
             <a:extLst>
               <a:ext uri="{FF2B5EF4-FFF2-40B4-BE49-F238E27FC236}">
-                <a16:creationId xmlns:a16="http://schemas.microsoft.com/office/drawing/2014/main" id="{64579911-EDBB-5C57-B4B7-90E9861DBA8F}"/>
+                <a16:creationId xmlns:a16="http://schemas.microsoft.com/office/drawing/2014/main" id="{F71ACAB1-D4E7-1E66-7452-087467CD6CBF}"/>
               </a:ext>
             </a:extLst>
           </p:cNvPr>
@@ -4006,7 +4006,7 @@
           <p:cNvPr id="3" name="テキスト ボックス 2">
             <a:extLst>
               <a:ext uri="{FF2B5EF4-FFF2-40B4-BE49-F238E27FC236}">
-                <a16:creationId xmlns:a16="http://schemas.microsoft.com/office/drawing/2014/main" id="{153977E4-46DE-6C0F-AC90-9B34A5E5E9C8}"/>
+                <a16:creationId xmlns:a16="http://schemas.microsoft.com/office/drawing/2014/main" id="{17417E75-47B2-353C-D96E-C5C03C89F3CA}"/>
               </a:ext>
             </a:extLst>
           </p:cNvPr>
@@ -4046,7 +4046,7 @@
           <p:cNvPr id="4" name="テキスト ボックス 3">
             <a:extLst>
               <a:ext uri="{FF2B5EF4-FFF2-40B4-BE49-F238E27FC236}">
-                <a16:creationId xmlns:a16="http://schemas.microsoft.com/office/drawing/2014/main" id="{FA25C90F-3214-960E-EF68-606F58B1351A}"/>
+                <a16:creationId xmlns:a16="http://schemas.microsoft.com/office/drawing/2014/main" id="{EE460276-6929-49D9-B411-373D0F328F4B}"/>
               </a:ext>
             </a:extLst>
           </p:cNvPr>
@@ -4167,7 +4167,7 @@
           <p:cNvPr id="5" name="テキスト ボックス 4">
             <a:extLst>
               <a:ext uri="{FF2B5EF4-FFF2-40B4-BE49-F238E27FC236}">
-                <a16:creationId xmlns:a16="http://schemas.microsoft.com/office/drawing/2014/main" id="{053D2230-2922-55A2-7D53-8E49CE437BFA}"/>
+                <a16:creationId xmlns:a16="http://schemas.microsoft.com/office/drawing/2014/main" id="{C773A323-6A82-7E45-23C7-0F7A2C50CD22}"/>
               </a:ext>
             </a:extLst>
           </p:cNvPr>
@@ -4214,7 +4214,7 @@
             <a:hlinkClick r:id="" action="ppaction://media"/>
             <a:extLst>
               <a:ext uri="{FF2B5EF4-FFF2-40B4-BE49-F238E27FC236}">
-                <a16:creationId xmlns:a16="http://schemas.microsoft.com/office/drawing/2014/main" id="{BC548336-BE74-B036-F8D1-5032C14CB560}"/>
+                <a16:creationId xmlns:a16="http://schemas.microsoft.com/office/drawing/2014/main" id="{F597A07B-BD58-E7D5-0DBA-95E5971BF0FF}"/>
               </a:ext>
             </a:extLst>
           </p:cNvPr>
@@ -4249,7 +4249,7 @@
     </p:spTree>
     <p:extLst>
       <p:ext uri="{BB962C8B-B14F-4D97-AF65-F5344CB8AC3E}">
-        <p14:creationId xmlns:p14="http://schemas.microsoft.com/office/powerpoint/2010/main" val="3367288386"/>
+        <p14:creationId xmlns:p14="http://schemas.microsoft.com/office/powerpoint/2010/main" val="2482759364"/>
       </p:ext>
     </p:extLst>
   </p:cSld>
@@ -4373,7 +4373,7 @@
           <p:cNvPr id="2" name="テキスト ボックス 1">
             <a:extLst>
               <a:ext uri="{FF2B5EF4-FFF2-40B4-BE49-F238E27FC236}">
-                <a16:creationId xmlns:a16="http://schemas.microsoft.com/office/drawing/2014/main" id="{44035005-8D4D-CE88-83E3-009EC2CE0427}"/>
+                <a16:creationId xmlns:a16="http://schemas.microsoft.com/office/drawing/2014/main" id="{30D42445-292E-A5C0-8C6D-F3971E654553}"/>
               </a:ext>
             </a:extLst>
           </p:cNvPr>
@@ -4419,7 +4419,7 @@
           <p:cNvPr id="3" name="テキスト ボックス 2">
             <a:extLst>
               <a:ext uri="{FF2B5EF4-FFF2-40B4-BE49-F238E27FC236}">
-                <a16:creationId xmlns:a16="http://schemas.microsoft.com/office/drawing/2014/main" id="{15B8C614-0067-0B81-8B99-AE443DA128B5}"/>
+                <a16:creationId xmlns:a16="http://schemas.microsoft.com/office/drawing/2014/main" id="{18AEEA06-8772-A194-477B-7B47D3D0D9F2}"/>
               </a:ext>
             </a:extLst>
           </p:cNvPr>
@@ -4459,7 +4459,7 @@
           <p:cNvPr id="4" name="テキスト ボックス 3">
             <a:extLst>
               <a:ext uri="{FF2B5EF4-FFF2-40B4-BE49-F238E27FC236}">
-                <a16:creationId xmlns:a16="http://schemas.microsoft.com/office/drawing/2014/main" id="{8228FB80-F99A-1956-CC38-1E3974CBEE20}"/>
+                <a16:creationId xmlns:a16="http://schemas.microsoft.com/office/drawing/2014/main" id="{4963140E-4617-1318-1787-C6A6A80854B7}"/>
               </a:ext>
             </a:extLst>
           </p:cNvPr>
@@ -4518,7 +4518,7 @@
           <p:cNvPr id="5" name="テキスト ボックス 4">
             <a:extLst>
               <a:ext uri="{FF2B5EF4-FFF2-40B4-BE49-F238E27FC236}">
-                <a16:creationId xmlns:a16="http://schemas.microsoft.com/office/drawing/2014/main" id="{A4899607-7C10-EBAD-E8E9-3AD564B59181}"/>
+                <a16:creationId xmlns:a16="http://schemas.microsoft.com/office/drawing/2014/main" id="{2AF4527F-2716-DFE4-DF02-F829FD82969D}"/>
               </a:ext>
             </a:extLst>
           </p:cNvPr>
@@ -4565,7 +4565,7 @@
             <a:hlinkClick r:id="" action="ppaction://media"/>
             <a:extLst>
               <a:ext uri="{FF2B5EF4-FFF2-40B4-BE49-F238E27FC236}">
-                <a16:creationId xmlns:a16="http://schemas.microsoft.com/office/drawing/2014/main" id="{00FD711A-7922-180C-F1C3-3172E8DA9BF1}"/>
+                <a16:creationId xmlns:a16="http://schemas.microsoft.com/office/drawing/2014/main" id="{DC39E972-5D43-A1CB-8BBA-C8FE8F5CBCA6}"/>
               </a:ext>
             </a:extLst>
           </p:cNvPr>
@@ -4600,7 +4600,7 @@
     </p:spTree>
     <p:extLst>
       <p:ext uri="{BB962C8B-B14F-4D97-AF65-F5344CB8AC3E}">
-        <p14:creationId xmlns:p14="http://schemas.microsoft.com/office/powerpoint/2010/main" val="3651618670"/>
+        <p14:creationId xmlns:p14="http://schemas.microsoft.com/office/powerpoint/2010/main" val="1877337574"/>
       </p:ext>
     </p:extLst>
   </p:cSld>
@@ -4724,7 +4724,7 @@
           <p:cNvPr id="2" name="テキスト ボックス 1">
             <a:extLst>
               <a:ext uri="{FF2B5EF4-FFF2-40B4-BE49-F238E27FC236}">
-                <a16:creationId xmlns:a16="http://schemas.microsoft.com/office/drawing/2014/main" id="{B696B9BD-481C-24EA-445E-61018E6F901E}"/>
+                <a16:creationId xmlns:a16="http://schemas.microsoft.com/office/drawing/2014/main" id="{D8AA7341-C138-87CA-549E-BF6A4BC44356}"/>
               </a:ext>
             </a:extLst>
           </p:cNvPr>
@@ -4770,7 +4770,7 @@
           <p:cNvPr id="3" name="テキスト ボックス 2">
             <a:extLst>
               <a:ext uri="{FF2B5EF4-FFF2-40B4-BE49-F238E27FC236}">
-                <a16:creationId xmlns:a16="http://schemas.microsoft.com/office/drawing/2014/main" id="{E362DE4C-D50D-FC37-CE58-5672F48C0EF4}"/>
+                <a16:creationId xmlns:a16="http://schemas.microsoft.com/office/drawing/2014/main" id="{F8B220AF-F827-9664-8DF3-0E66B07C4AD7}"/>
               </a:ext>
             </a:extLst>
           </p:cNvPr>
@@ -4810,7 +4810,7 @@
           <p:cNvPr id="4" name="テキスト ボックス 3">
             <a:extLst>
               <a:ext uri="{FF2B5EF4-FFF2-40B4-BE49-F238E27FC236}">
-                <a16:creationId xmlns:a16="http://schemas.microsoft.com/office/drawing/2014/main" id="{8E31904A-FD28-5563-1A09-914C957E7159}"/>
+                <a16:creationId xmlns:a16="http://schemas.microsoft.com/office/drawing/2014/main" id="{C7A1A258-87BA-B79F-3645-DE1C5F9BA866}"/>
               </a:ext>
             </a:extLst>
           </p:cNvPr>
@@ -4920,7 +4920,7 @@
           <p:cNvPr id="5" name="テキスト ボックス 4">
             <a:extLst>
               <a:ext uri="{FF2B5EF4-FFF2-40B4-BE49-F238E27FC236}">
-                <a16:creationId xmlns:a16="http://schemas.microsoft.com/office/drawing/2014/main" id="{D470B63D-2137-14AB-C212-F6C83A173192}"/>
+                <a16:creationId xmlns:a16="http://schemas.microsoft.com/office/drawing/2014/main" id="{44CA1619-83E6-7F33-F015-8DC3E86D98C2}"/>
               </a:ext>
             </a:extLst>
           </p:cNvPr>
@@ -4967,7 +4967,7 @@
             <a:hlinkClick r:id="" action="ppaction://media"/>
             <a:extLst>
               <a:ext uri="{FF2B5EF4-FFF2-40B4-BE49-F238E27FC236}">
-                <a16:creationId xmlns:a16="http://schemas.microsoft.com/office/drawing/2014/main" id="{7BF13154-BDED-9887-85CE-5198A377E184}"/>
+                <a16:creationId xmlns:a16="http://schemas.microsoft.com/office/drawing/2014/main" id="{E07F463E-5232-4EBB-D75C-406D83F11325}"/>
               </a:ext>
             </a:extLst>
           </p:cNvPr>
@@ -5002,7 +5002,7 @@
     </p:spTree>
     <p:extLst>
       <p:ext uri="{BB962C8B-B14F-4D97-AF65-F5344CB8AC3E}">
-        <p14:creationId xmlns:p14="http://schemas.microsoft.com/office/powerpoint/2010/main" val="2630122590"/>
+        <p14:creationId xmlns:p14="http://schemas.microsoft.com/office/powerpoint/2010/main" val="3155839980"/>
       </p:ext>
     </p:extLst>
   </p:cSld>
@@ -5126,7 +5126,7 @@
           <p:cNvPr id="2" name="テキスト ボックス 1">
             <a:extLst>
               <a:ext uri="{FF2B5EF4-FFF2-40B4-BE49-F238E27FC236}">
-                <a16:creationId xmlns:a16="http://schemas.microsoft.com/office/drawing/2014/main" id="{7C746FEA-6A67-004F-E1CB-D593CF058B8B}"/>
+                <a16:creationId xmlns:a16="http://schemas.microsoft.com/office/drawing/2014/main" id="{1921E9BF-EA30-08A3-CAAB-B8FE2F45830E}"/>
               </a:ext>
             </a:extLst>
           </p:cNvPr>
@@ -5172,7 +5172,7 @@
           <p:cNvPr id="3" name="テキスト ボックス 2">
             <a:extLst>
               <a:ext uri="{FF2B5EF4-FFF2-40B4-BE49-F238E27FC236}">
-                <a16:creationId xmlns:a16="http://schemas.microsoft.com/office/drawing/2014/main" id="{6CB24DD2-3CA5-60D3-0632-35390AFAB1FC}"/>
+                <a16:creationId xmlns:a16="http://schemas.microsoft.com/office/drawing/2014/main" id="{715170AD-6CCE-2AE5-DCE9-6A5C6190702E}"/>
               </a:ext>
             </a:extLst>
           </p:cNvPr>
@@ -5212,7 +5212,7 @@
           <p:cNvPr id="4" name="テキスト ボックス 3">
             <a:extLst>
               <a:ext uri="{FF2B5EF4-FFF2-40B4-BE49-F238E27FC236}">
-                <a16:creationId xmlns:a16="http://schemas.microsoft.com/office/drawing/2014/main" id="{8A18F309-2E68-D8A9-2145-FBE3FA7D5E2B}"/>
+                <a16:creationId xmlns:a16="http://schemas.microsoft.com/office/drawing/2014/main" id="{047B2C48-77BC-09F8-D5B9-8C3B80E38FBE}"/>
               </a:ext>
             </a:extLst>
           </p:cNvPr>
@@ -5236,20 +5236,14 @@
           <a:lstStyle/>
           <a:p>
             <a:r>
-              <a:rPr kumimoji="1" lang="en-US" altLang="ja-JP" sz="2000">
+              <a:rPr kumimoji="1" lang="ja-JP" altLang="en-US" sz="2000">
                 <a:solidFill>
                   <a:srgbClr val="333333"/>
                 </a:solidFill>
                 <a:latin typeface="Arial" panose="020B0604020202020204" pitchFamily="34" charset="0"/>
               </a:rPr>
-              <a:t>Rebrand mobile app as SPOTPALETTE</a:t>
-            </a:r>
-            <a:endParaRPr kumimoji="1" lang="ja-JP" altLang="en-US" sz="2000">
-              <a:solidFill>
-                <a:srgbClr val="333333"/>
-              </a:solidFill>
-              <a:latin typeface="Arial" panose="020B0604020202020204" pitchFamily="34" charset="0"/>
-            </a:endParaRPr>
+              <a:t>直近のコミットでは、実装の見直しと継続的な改善が行われました。</a:t>
+            </a:r>
           </a:p>
         </p:txBody>
       </p:sp>
@@ -5258,7 +5252,7 @@
           <p:cNvPr id="5" name="テキスト ボックス 4">
             <a:extLst>
               <a:ext uri="{FF2B5EF4-FFF2-40B4-BE49-F238E27FC236}">
-                <a16:creationId xmlns:a16="http://schemas.microsoft.com/office/drawing/2014/main" id="{F904017E-46D1-F734-F704-14D4FF744F78}"/>
+                <a16:creationId xmlns:a16="http://schemas.microsoft.com/office/drawing/2014/main" id="{03DEEBB2-152D-6820-4850-06B7A0F22EEF}"/>
               </a:ext>
             </a:extLst>
           </p:cNvPr>
@@ -5305,7 +5299,7 @@
             <a:hlinkClick r:id="" action="ppaction://media"/>
             <a:extLst>
               <a:ext uri="{FF2B5EF4-FFF2-40B4-BE49-F238E27FC236}">
-                <a16:creationId xmlns:a16="http://schemas.microsoft.com/office/drawing/2014/main" id="{15CFF888-97AC-A0F8-DFD7-E0BB58E01245}"/>
+                <a16:creationId xmlns:a16="http://schemas.microsoft.com/office/drawing/2014/main" id="{58922EDE-0D5A-D7F9-63C8-5D7D552AFB34}"/>
               </a:ext>
             </a:extLst>
           </p:cNvPr>
@@ -5340,7 +5334,7 @@
     </p:spTree>
     <p:extLst>
       <p:ext uri="{BB962C8B-B14F-4D97-AF65-F5344CB8AC3E}">
-        <p14:creationId xmlns:p14="http://schemas.microsoft.com/office/powerpoint/2010/main" val="1304850829"/>
+        <p14:creationId xmlns:p14="http://schemas.microsoft.com/office/powerpoint/2010/main" val="729949045"/>
       </p:ext>
     </p:extLst>
   </p:cSld>
@@ -5383,7 +5377,7 @@
                                   <p:childTnLst>
                                     <p:cmd type="call" cmd="playFrom(0.0)">
                                       <p:cBhvr>
-                                        <p:cTn id="6" dur="6761" fill="hold"/>
+                                        <p:cTn id="6" dur="6076" fill="hold"/>
                                         <p:tgtEl>
                                           <p:spTgt spid="6"/>
                                         </p:tgtEl>
@@ -5464,7 +5458,7 @@
           <p:cNvPr id="2" name="テキスト ボックス 1">
             <a:extLst>
               <a:ext uri="{FF2B5EF4-FFF2-40B4-BE49-F238E27FC236}">
-                <a16:creationId xmlns:a16="http://schemas.microsoft.com/office/drawing/2014/main" id="{5E6B00C1-B8C7-20F3-2854-69C962807AFF}"/>
+                <a16:creationId xmlns:a16="http://schemas.microsoft.com/office/drawing/2014/main" id="{D175EC8F-4C28-5644-F3C1-7B15E3E0B711}"/>
               </a:ext>
             </a:extLst>
           </p:cNvPr>
@@ -5510,7 +5504,7 @@
           <p:cNvPr id="3" name="テキスト ボックス 2">
             <a:extLst>
               <a:ext uri="{FF2B5EF4-FFF2-40B4-BE49-F238E27FC236}">
-                <a16:creationId xmlns:a16="http://schemas.microsoft.com/office/drawing/2014/main" id="{EECD8C6A-F8A8-1AAE-8A27-BD2CB44F0D13}"/>
+                <a16:creationId xmlns:a16="http://schemas.microsoft.com/office/drawing/2014/main" id="{F53E85B9-6B60-8E91-6269-A9DBA78C4A12}"/>
               </a:ext>
             </a:extLst>
           </p:cNvPr>
@@ -5550,7 +5544,7 @@
           <p:cNvPr id="4" name="テキスト ボックス 3">
             <a:extLst>
               <a:ext uri="{FF2B5EF4-FFF2-40B4-BE49-F238E27FC236}">
-                <a16:creationId xmlns:a16="http://schemas.microsoft.com/office/drawing/2014/main" id="{8B41A347-761D-B636-A63A-484E4ED897FD}"/>
+                <a16:creationId xmlns:a16="http://schemas.microsoft.com/office/drawing/2014/main" id="{4FD11D9C-68D4-61FE-2E1D-1721D93FE5FE}"/>
               </a:ext>
             </a:extLst>
           </p:cNvPr>
@@ -5615,7 +5609,7 @@
           <p:cNvPr id="5" name="テキスト ボックス 4">
             <a:extLst>
               <a:ext uri="{FF2B5EF4-FFF2-40B4-BE49-F238E27FC236}">
-                <a16:creationId xmlns:a16="http://schemas.microsoft.com/office/drawing/2014/main" id="{29A21E16-5F68-D7A5-BADB-4F1C8DFEBAD2}"/>
+                <a16:creationId xmlns:a16="http://schemas.microsoft.com/office/drawing/2014/main" id="{5AC74581-AD32-8368-A021-CCC422658EF1}"/>
               </a:ext>
             </a:extLst>
           </p:cNvPr>
@@ -5662,7 +5656,7 @@
             <a:hlinkClick r:id="" action="ppaction://media"/>
             <a:extLst>
               <a:ext uri="{FF2B5EF4-FFF2-40B4-BE49-F238E27FC236}">
-                <a16:creationId xmlns:a16="http://schemas.microsoft.com/office/drawing/2014/main" id="{3A565348-51FA-53EA-E01C-87DD8A808308}"/>
+                <a16:creationId xmlns:a16="http://schemas.microsoft.com/office/drawing/2014/main" id="{77096012-E2B7-27DA-126B-ABAF6BB27664}"/>
               </a:ext>
             </a:extLst>
           </p:cNvPr>
@@ -5697,7 +5691,7 @@
     </p:spTree>
     <p:extLst>
       <p:ext uri="{BB962C8B-B14F-4D97-AF65-F5344CB8AC3E}">
-        <p14:creationId xmlns:p14="http://schemas.microsoft.com/office/powerpoint/2010/main" val="3111838317"/>
+        <p14:creationId xmlns:p14="http://schemas.microsoft.com/office/powerpoint/2010/main" val="1779728023"/>
       </p:ext>
     </p:extLst>
   </p:cSld>
